--- a/it/slides/24-Architettura_dei_Calcolatori-Superscalari_HPC_GPU_FPGA-Codice.pptx
+++ b/it/slides/24-Architettura_dei_Calcolatori-Superscalari_HPC_GPU_FPGA-Codice.pptx
@@ -127,25 +127,45 @@
   <p:extLst>
     <p:ext uri="{521415D9-36F7-43E2-AB2F-B90AF26B5E84}">
       <p14:sectionLst xmlns:p14="http://schemas.microsoft.com/office/powerpoint/2010/main">
-        <p14:section name="Apertura" id="{6a5e1dc3-7e44-f7e8-fc83-7b6dba1582d6}">
+        <p14:section name="Apertura" id="{d91d24de-f7a9-ea85-fdb9-969b3edfbf7d}">
           <p14:sldIdLst>
             <p14:sldId id="256"/>
             <p14:sldId id="257"/>
           </p14:sldIdLst>
         </p14:section>
-        <p14:section name="I listati" id="{33aae4a0-7980-be46-5931-12e3e65c8875}">
+        <p14:section name="Riscaldamento sulla macchina" id="{2bb4d4c5-c508-bb59-cc38-578b7984f16d}">
           <p14:sldIdLst>
             <p14:sldId id="258"/>
+          </p14:sldIdLst>
+        </p14:section>
+        <p14:section name="Processori superscalari" id="{61e2f4d6-f5cb-560e-c67f-fad984ae2bc4}">
+          <p14:sldIdLst>
             <p14:sldId id="259"/>
             <p14:sldId id="260"/>
+          </p14:sldIdLst>
+        </p14:section>
+        <p14:section name="Vettori: un'istruzione, molti dati" id="{85f1ee6e-e6a6-2c8c-9291-cf2ba4fc95c3}">
+          <p14:sldIdLst>
             <p14:sldId id="261"/>
             <p14:sldId id="262"/>
+          </p14:sldIdLst>
+        </p14:section>
+        <p14:section name="Acceleratori GPU" id="{ec5cdd0e-b303-5dde-5e50-1a7a380269e6}">
+          <p14:sldIdLst>
             <p14:sldId id="263"/>
+          </p14:sldIdLst>
+        </p14:section>
+        <p14:section name="Acceleratori FPGA" id="{99b64a98-1aa5-aac8-834e-198d8702e7cc}">
+          <p14:sldIdLst>
             <p14:sldId id="264"/>
+          </p14:sldIdLst>
+        </p14:section>
+        <p14:section name="Ritorno alla macchina" id="{82381e26-072e-b188-e3ad-bd82e000711c}">
+          <p14:sldIdLst>
             <p14:sldId id="265"/>
           </p14:sldIdLst>
         </p14:section>
-        <p14:section name="Il programma completo" id="{15464e6f-82a3-8b23-be11-55fe87369be8}">
+        <p14:section name="Il programma completo" id="{74af1c24-d80a-359a-d757-e3d47cbc1204}">
           <p14:sldIdLst>
             <p14:sldId id="266"/>
             <p14:sldId id="267"/>
@@ -153,7 +173,7 @@
             <p14:sldId id="269"/>
           </p14:sldIdLst>
         </p14:section>
-        <p14:section name="Eseguire e provare" id="{490f4416-a588-71ed-5f3f-a72e3eb785ee}">
+        <p14:section name="Eseguire e provare" id="{861ac3e5-c1b5-ecc2-4dec-4bb0f14ca8df}">
           <p14:sldIdLst>
             <p14:sldId id="270"/>
             <p14:sldId id="271"/>
@@ -163,7 +183,7 @@
             <p14:sldId id="275"/>
           </p14:sldIdLst>
         </p14:section>
-        <p14:section name="Esercizi" id="{644985fa-1505-1edb-4824-336765678b7b}">
+        <p14:section name="Esercizi" id="{00f9c087-c20f-a371-13d6-f063f8540a1e}">
           <p14:sldIdLst>
             <p14:sldId id="276"/>
           </p14:sldIdLst>
@@ -3206,7 +3226,7 @@
                 <a:ea typeface="Cambria" pitchFamily="34" charset="-122"/>
                 <a:cs typeface="Cambria" pitchFamily="34" charset="-120"/>
               </a:rPr>
-              <a:t>Oltre un solo core: RISC-V superscalare, HPC, GPU e FPGA: il codice</a:t>
+              <a:t>Oltre un solo core: RISC‑V superscalare, HPC, GPU e FPGA: il codice</a:t>
             </a:r>
             <a:endParaRPr lang="en-US" sz="3500" dirty="0"/>
           </a:p>
@@ -3326,7 +3346,63 @@
       </p:sp>
       <p:sp>
         <p:nvSpPr>
-          <p:cNvPr id="11" name="Shape 9"/>
+          <p:cNvPr id="11" name="Text 9"/>
+          <p:cNvSpPr txBox="1"/>
+          <p:nvPr/>
+        </p:nvSpPr>
+        <p:spPr>
+          <a:xfrm>
+            <a:off x="4693615" y="566928"/>
+            <a:ext cx="6949440" cy="640080"/>
+          </a:xfrm>
+          <a:prstGeom prst="rect">
+            <a:avLst/>
+          </a:prstGeom>
+          <a:noFill/>
+          <a:ln/>
+        </p:spPr>
+        <p:txBody>
+          <a:bodyPr wrap="square" lIns="0" tIns="0" rIns="0" bIns="0" rtlCol="0" anchor="t"/>
+          <a:lstStyle/>
+          <a:p>
+            <a:pPr algn="r" indent="0" marL="0">
+              <a:buNone/>
+            </a:pPr>
+            <a:r>
+              <a:rPr lang="en-US" sz="1300" dirty="0">
+                <a:solidFill>
+                  <a:srgbClr val="CFE3EA"/>
+                </a:solidFill>
+                <a:latin typeface="Calibri" pitchFamily="34" charset="0"/>
+                <a:ea typeface="Calibri" pitchFamily="34" charset="-122"/>
+                <a:cs typeface="Calibri" pitchFamily="34" charset="-120"/>
+              </a:rPr>
+              <a:t>Presentazione del codice. I concetti, le figure e le domande sono nella presentazione della lezione:</a:t>
+            </a:r>
+            <a:endParaRPr lang="en-US" sz="1300" dirty="0"/>
+          </a:p>
+          <a:p>
+            <a:pPr algn="r" indent="0" marL="0">
+              <a:buNone/>
+            </a:pPr>
+            <a:r>
+              <a:rPr lang="en-US" sz="1300" dirty="0">
+                <a:solidFill>
+                  <a:srgbClr val="CFE3EA"/>
+                </a:solidFill>
+                <a:latin typeface="Calibri" pitchFamily="34" charset="0"/>
+                <a:ea typeface="Calibri" pitchFamily="34" charset="-122"/>
+                <a:cs typeface="Calibri" pitchFamily="34" charset="-120"/>
+              </a:rPr>
+              <a:t>24-Architettura_dei_Calcolatori-Superscalari_HPC_GPU_FPGA.pptx</a:t>
+            </a:r>
+            <a:endParaRPr lang="en-US" sz="1300" dirty="0"/>
+          </a:p>
+        </p:txBody>
+      </p:sp>
+      <p:sp>
+        <p:nvSpPr>
+          <p:cNvPr id="12" name="Shape 10"/>
           <p:cNvSpPr/>
           <p:nvPr/>
         </p:nvSpPr>
@@ -3353,7 +3429,7 @@
       </p:sp>
       <p:pic>
         <p:nvPicPr>
-          <p:cNvPr id="12" name="Image 0" descr="/Users/raffaelemontella/devel/riscv-prg32/computer-architecture-with-prg32/tools/assets/cluster_1.jpg">    </p:cNvPr>
+          <p:cNvPr id="13" name="Image 0" descr="/Users/raffaelemontella/devel/riscv-prg32/computer-architecture-with-prg32/tools/assets/rcf_cluster.jpg">    </p:cNvPr>
           <p:cNvPicPr>
             <a:picLocks noChangeAspect="1"/>
           </p:cNvPicPr>
@@ -3367,8 +3443,8 @@
         </p:blipFill>
         <p:spPr>
           <a:xfrm>
-            <a:off x="8915095" y="4251960"/>
-            <a:ext cx="2438400" cy="1828800"/>
+            <a:off x="8716975" y="4686243"/>
+            <a:ext cx="2834640" cy="960234"/>
           </a:xfrm>
           <a:prstGeom prst="rect">
             <a:avLst/>

--- a/it/slides/24-Architettura_dei_Calcolatori-Superscalari_HPC_GPU_FPGA-Codice.pptx
+++ b/it/slides/24-Architettura_dei_Calcolatori-Superscalari_HPC_GPU_FPGA-Codice.pptx
@@ -127,45 +127,45 @@
   <p:extLst>
     <p:ext uri="{521415D9-36F7-43E2-AB2F-B90AF26B5E84}">
       <p14:sectionLst xmlns:p14="http://schemas.microsoft.com/office/powerpoint/2010/main">
-        <p14:section name="Apertura" id="{d91d24de-f7a9-ea85-fdb9-969b3edfbf7d}">
+        <p14:section name="Apertura" id="{f7cb39e0-30f1-80be-3a30-dbe37a948038}">
           <p14:sldIdLst>
             <p14:sldId id="256"/>
             <p14:sldId id="257"/>
           </p14:sldIdLst>
         </p14:section>
-        <p14:section name="Riscaldamento sulla macchina" id="{2bb4d4c5-c508-bb59-cc38-578b7984f16d}">
+        <p14:section name="Riscaldamento sulla macchina" id="{477132c6-6fc5-b731-0af6-c930645d7c1f}">
           <p14:sldIdLst>
             <p14:sldId id="258"/>
           </p14:sldIdLst>
         </p14:section>
-        <p14:section name="Processori superscalari" id="{61e2f4d6-f5cb-560e-c67f-fad984ae2bc4}">
+        <p14:section name="Processori superscalari" id="{0abe3a3b-87d7-161e-715d-ac0ae9d86ac1}">
           <p14:sldIdLst>
             <p14:sldId id="259"/>
             <p14:sldId id="260"/>
           </p14:sldIdLst>
         </p14:section>
-        <p14:section name="Vettori: un'istruzione, molti dati" id="{85f1ee6e-e6a6-2c8c-9291-cf2ba4fc95c3}">
+        <p14:section name="Vettori: un'istruzione, molti dati" id="{95f0fe1c-8c50-f416-4ede-5f24c116159c}">
           <p14:sldIdLst>
             <p14:sldId id="261"/>
             <p14:sldId id="262"/>
           </p14:sldIdLst>
         </p14:section>
-        <p14:section name="Acceleratori GPU" id="{ec5cdd0e-b303-5dde-5e50-1a7a380269e6}">
+        <p14:section name="Acceleratori GPU" id="{f464e9d8-3a6c-6a71-afe8-bc4204501ff7}">
           <p14:sldIdLst>
             <p14:sldId id="263"/>
           </p14:sldIdLst>
         </p14:section>
-        <p14:section name="Acceleratori FPGA" id="{99b64a98-1aa5-aac8-834e-198d8702e7cc}">
+        <p14:section name="Acceleratori FPGA" id="{231104ee-6e54-57cb-7692-6a6e3e397431}">
           <p14:sldIdLst>
             <p14:sldId id="264"/>
           </p14:sldIdLst>
         </p14:section>
-        <p14:section name="Ritorno alla macchina" id="{82381e26-072e-b188-e3ad-bd82e000711c}">
+        <p14:section name="Ritorno alla macchina" id="{58b9e874-ef26-1560-85d3-3f5e4323b3f2}">
           <p14:sldIdLst>
             <p14:sldId id="265"/>
           </p14:sldIdLst>
         </p14:section>
-        <p14:section name="Il programma completo" id="{74af1c24-d80a-359a-d757-e3d47cbc1204}">
+        <p14:section name="Il programma completo" id="{80c8c245-f01c-e44a-915e-b29ed45b2daf}">
           <p14:sldIdLst>
             <p14:sldId id="266"/>
             <p14:sldId id="267"/>
@@ -173,7 +173,7 @@
             <p14:sldId id="269"/>
           </p14:sldIdLst>
         </p14:section>
-        <p14:section name="Eseguire e provare" id="{861ac3e5-c1b5-ecc2-4dec-4bb0f14ca8df}">
+        <p14:section name="Eseguire e provare" id="{697fabd9-5e68-960d-7fad-6328a74692a9}">
           <p14:sldIdLst>
             <p14:sldId id="270"/>
             <p14:sldId id="271"/>
@@ -183,7 +183,7 @@
             <p14:sldId id="275"/>
           </p14:sldIdLst>
         </p14:section>
-        <p14:section name="Esercizi" id="{00f9c087-c20f-a371-13d6-f063f8540a1e}">
+        <p14:section name="Esercizi" id="{74171ac0-39f3-321a-fc59-4aec8f1789e0}">
           <p14:sldIdLst>
             <p14:sldId id="276"/>
           </p14:sldIdLst>
@@ -592,7 +592,9 @@
           <a:p>
             <a:r>
               <a:rPr lang="en-US" dirty="0"/>
-              <a:t>Questa è la presentazione del codice della Lezione 24. La presentazione della lezione contiene i concetti; questa contiene tutto ciò che si scrive e si esegue: i listati con la loro spiegazione, il programma completo, che cosa mostra, e il modo di provarlo su ciascuno dei tre host.</a:t>
+              <a:t>Questa è la presentazione del codice della Lezione 24. La presentazione della lezione contiene i concetti; questa contiene tutto ciò che si scrive e si esegue: i listati con la loro spiegazione, il programma completo, che cosa mostra, e il modo di provarlo su ciascuno dei tre host.
+Stato di apprendimento: DA COMPRENDERE OGGI, alla fine di questa lezione lo spiegate, lo seguite passo passo e lo applicate da soli; DA UTILIZZARE OGGI, oggi seguite e usate la ricetta; come funziona dentro si spiega più avanti, o non fa parte del corso; DA COMPRENDERE PIÙ AVANTI, riconoscete il nome e lo scopo; lo spiega una lezione successiva. Una slide senza etichetta è contesto: una storia, un esempio, una domanda, un esercizio.
+Stato di apprendimento di questa lezione. DA COMPRENDERE OGGI: l'equazione delle prestazioni; i processori superscalari; le istruzioni vettoriali; HPC e legge di Amdahl; acceleratori GPU e FPGA. DA UTILIZZARE OGGI: il programma completo, gli strumenti di PRG32 (si usa, non si studia, in questo corso). DA COMPRENDERE PIÙ AVANTI: niente. Una slide senza etichetta è contesto: una storia, un esempio, una domanda, un esercizio.</a:t>
             </a:r>
             <a:endParaRPr lang="en-US" dirty="0"/>
           </a:p>
@@ -681,6 +683,7 @@
             <a:r>
               <a:rPr lang="en-US" dirty="0"/>
               <a:t>Svuotare le 960 celle della mappa. Sul kit: un byte per giro, 3.840 cicli. Su un core RISC-V fuori ordine: lo stesso binario, in una frazione di quei cicli. Con vettori a 128 bit: 60 giri. Su una GPU: un lancio di 960 thread, più due copie. Su una FPGA: 960 flip-flop con un reset comune, un ciclo di clock. Il lavoro è lo stesso; cambia quanta parte ne avviene nello stesso momento, e quanto costa ottenerlo. La domanda dell'ingegnere non è quale sia la più veloce, ma quale basti.
+DA COMPRENDERE OGGI: acceleratori GPU e FPGA.
 Per il docente: Il lavoro è lo stesso; cambia quanta parte ne avviene nello stesso momento. E i costi: alla prima riga servono un chip da due euro e quattro righe di assembly; all'ultima serve un progetto hardware. La domanda dell'ingegnere non è mai quale sia la più veloce, ma quale basti.</a:t>
             </a:r>
             <a:endParaRPr lang="en-US" dirty="0"/>
@@ -770,6 +773,7 @@
             <a:r>
               <a:rPr lang="en-US" dirty="0"/>
               <a:t>Una pagina del programma completo, esattamente com'è nel repository. Leggetelo dall'inizio: l'intestazione dice che cosa mostra il programma e come compilarlo; seguono le tre funzioni init, update e draw, poi i dati. Le righe incontrate nei listati della lezione hanno qui gli stessi commenti.
+DA UTILIZZARE OGGI: il programma completo (si usa, non si studia, in questo corso).
 Per il docente: code/l24.S, come viene compilato ed eseguito dai test. I commenti fanno parte del programma, e sono in inglese come in tutti i listati: leggeteli con il codice.</a:t>
             </a:r>
             <a:endParaRPr lang="en-US" dirty="0"/>
@@ -859,6 +863,7 @@
             <a:r>
               <a:rPr lang="en-US" dirty="0"/>
               <a:t>Una pagina del programma completo, esattamente com'è nel repository. Leggetelo dall'inizio: l'intestazione dice che cosa mostra il programma e come compilarlo; seguono le tre funzioni init, update e draw, poi i dati. Le righe incontrate nei listati della lezione hanno qui gli stessi commenti.
+DA UTILIZZARE OGGI: il programma completo (si usa, non si studia, in questo corso).
 Per il docente: code/l24.S, come viene compilato ed eseguito dai test. I commenti fanno parte del programma, e sono in inglese come in tutti i listati: leggeteli con il codice.</a:t>
             </a:r>
             <a:endParaRPr lang="en-US" dirty="0"/>
@@ -948,6 +953,7 @@
             <a:r>
               <a:rPr lang="en-US" dirty="0"/>
               <a:t>Una pagina del programma completo, esattamente com'è nel repository. Leggetelo dall'inizio: l'intestazione dice che cosa mostra il programma e come compilarlo; seguono le tre funzioni init, update e draw, poi i dati. Le righe incontrate nei listati della lezione hanno qui gli stessi commenti.
+DA UTILIZZARE OGGI: il programma completo (si usa, non si studia, in questo corso).
 Per il docente: code/l24.S, come viene compilato ed eseguito dai test. I commenti fanno parte del programma, e sono in inglese come in tutti i listati: leggeteli con il codice.</a:t>
             </a:r>
             <a:endParaRPr lang="en-US" dirty="0"/>
@@ -1037,6 +1043,7 @@
             <a:r>
               <a:rPr lang="en-US" dirty="0"/>
               <a:t>Una pagina del programma completo, esattamente com'è nel repository. Leggetelo dall'inizio: l'intestazione dice che cosa mostra il programma e come compilarlo; seguono le tre funzioni init, update e draw, poi i dati. Le righe incontrate nei listati della lezione hanno qui gli stessi commenti.
+DA UTILIZZARE OGGI: il programma completo (si usa, non si studia, in questo corso).
 Per il docente: code/l24.S, come viene compilato ed eseguito dai test. I commenti fanno parte del programma, e sono in inglese come in tutti i listati: leggeteli con il codice.</a:t>
             </a:r>
             <a:endParaRPr lang="en-US" dirty="0"/>
@@ -1215,6 +1222,7 @@
             <a:r>
               <a:rPr lang="en-US" dirty="0"/>
               <a:t>La via più rapida: PRG32-QT sul vostro computer. Quattro passi, ciascuno con il suo comando. PRG32-QT si comporta come una scheda sulla porta 8080, ed è per questo che il comando di caricamento dice esp32c6. Con la modalità debug abilitata potete fermarvi su qualsiasi istruzione e leggere registri e memoria.
+DA UTILIZZARE OGGI: gli strumenti di PRG32 (si usa, non si studia, in questo corso).
 Per il docente: Eseguito dai test: la cartuccia di questa slide è compilata con questo comando ed eseguita sull'esecutore senza interfaccia di PRG32-QT. Senza la toolchain: importate il file .prg32 in PRG32-QT e scegliete Run Cartridge. Tasti: frecce o WASD per il joystick, Z o J per A, X o K per B, Invio per Start, Esc per tornare a Setup.</a:t>
             </a:r>
             <a:endParaRPr lang="en-US" dirty="0"/>
@@ -1304,6 +1312,7 @@
             <a:r>
               <a:rPr lang="en-US" dirty="0"/>
               <a:t>Lo stesso programma sull'emulatore. QEMU esegue il firmware vero su un chip emulato, quindi la cartuccia va compilata per l'architettura qemu. Caricate la cartuccia mentre QEMU è chiuso. Il firmware si apre sul menu Setup: scegliete Run Cartridge e lo slot. Ricordate che la tastiera è letta dal terminale, non dalla finestra con l'immagine.
+DA UTILIZZARE OGGI: gli strumenti di PRG32 (si usa, non si studia, in questo corso).
 Per il docente: Verificato dai test fino al caricamento: la cartuccia è compilata per l'architettura qemu e accettata nell'immagine flash dell'emulatore. Ciò che l'emulatore poi mostra non è verificato automaticamente: il QEMU di Espressif ha bisogno della sua finestra. Dall'ottobre 2026 il firmware parte da Setup: scegliete Run Cartridge, poi cart0.</a:t>
             </a:r>
             <a:endParaRPr lang="en-US" dirty="0"/>
@@ -1393,6 +1402,7 @@
             <a:r>
               <a:rPr lang="en-US" dirty="0"/>
               <a:t>Lo stesso programma sul kit. Il firmware si scrive una volta, via USB; dopo, le cartucce viaggiano sul Wi-Fi. Il comando di caricamento è quello usato per PRG32-QT con l'indirizzo della scheda. È l'unico host che i test automatici non eseguono: provatelo, e riferite ciò che vedete.
+DA UTILIZZARE OGGI: gli strumenti di PRG32 (si usa, non si studia, in questo corso).
 Per il docente: Non eseguito dai test: sulla macchina di prova non c'è una scheda. La cartuccia per l'architettura esp32c6 è compilata dai test; i passi sono quelli della documentazione di PRG32. Se la porta seriale non viene trovata, passatela esplicitamente. Per usare il Wi-Fi dell'aula: python3 -m prg32 wifi set --ssid NOME --password PASSWORD --mode sta.</a:t>
             </a:r>
             <a:endParaRPr lang="en-US" dirty="0"/>
@@ -1482,6 +1492,7 @@
             <a:r>
               <a:rPr lang="en-US" dirty="0"/>
               <a:t>I listati vettoriali di questa lezione non possono girare sul kit, il cui processore non ha l'estensione V. Sono provati invece su un processore emulato senza sistema: i comandi compilano un solo binario e lo eseguono con quattro lunghezze di vettore. Il codice di uscita è il risultato.
+DA UTILIZZARE OGGI: gli strumenti di PRG32 (si usa, non si studia, in questo corso).
 Per il docente: Eseguito dai test (tools/tests/run_all.sh, passo vectors). Su macOS non c'è il comando timeout: se un listato entra in un ciclo infinito, fermate QEMU con Ctrl-A X.</a:t>
             </a:r>
             <a:endParaRPr lang="en-US" dirty="0"/>
@@ -1660,6 +1671,7 @@
             <a:r>
               <a:rPr lang="en-US" dirty="0"/>
               <a:t>I cinque sintomi più comuni, che cosa significa ciascuno, e che cosa fare. Leggete il messaggio prima di cambiare qualcosa: quasi sempre nomina la causa.
+DA UTILIZZARE OGGI: gli strumenti di PRG32 (si usa, non si studia, in questo corso).
 Per il docente: Le prime tre righe coprono la maggior parte dei casi. Quando chiedete aiuto, incollate il comando e l'intero messaggio come testo. docs/usage/troubleshooting.md del repository di PRG32 ha l'elenco completo.</a:t>
             </a:r>
             <a:endParaRPr lang="en-US" dirty="0"/>
@@ -1838,6 +1850,7 @@
             <a:r>
               <a:rPr lang="en-US" dirty="0"/>
               <a:t>Il ciclo che svuota la mappa in new_game: 960 byte messi a zero. Quattro istruzioni per giro: lo store di un byte, l'incremento dell'indirizzo, il decremento del contatore, il salto all'indietro. In tutto 3.840 istruzioni, un byte alla volta, un'istruzione alla volta. Sul kit impiega circa 24 microsecondi, e nessuno ha bisogno che sia più veloce. È stato scelto perché è abbastanza piccolo da poterlo seguire su ogni macchina di oggi. In quanti modi lo si può rendere più veloce?
+DA COMPRENDERE OGGI: l'equazione delle prestazioni.
 Per il docente: Il ciclo del processore della Lezione 19. Nel caso migliore un'istruzione per ciclo di clock, e 160 milioni di cicli al secondo sul kit: circa 24 microsecondi. Nessuno ha bisogno che questo ciclo sia più veloce; è abbastanza piccolo da poterlo seguire su ogni macchina di oggi.</a:t>
             </a:r>
             <a:endParaRPr lang="en-US" dirty="0"/>
@@ -1927,6 +1940,7 @@
             <a:r>
               <a:rPr lang="en-US" dirty="0"/>
               <a:t>Che cosa si mette di mezzo. La seconda istruzione usa t0, che la prima sta ancora calcolando: non può correrle accanto. È una dipendenza sui dati. La terza non dipende da nessuno, eppure in un processore in ordine aspetta dietro la seconda. La quarta è un salto: finché non è risolto il processore non sa se la quinta vada eseguita. È una dipendenza sul controllo. I programmi veri sono pieni di catene così, quindi la larghezza da sola non basta.
+DA COMPRENDERE OGGI: i processori superscalari.
 Per il docente: Dipendenze sui dati, dipendenze sul controllo. Un superscalare in ordine si blocca a i2 e tutto ciò che sta dietro aspetta. Il rimedio è lasciare che i3 sorpassi.</a:t>
             </a:r>
             <a:endParaRPr lang="en-US" dirty="0"/>
@@ -2016,6 +2030,7 @@
             <a:r>
               <a:rPr lang="en-US" dirty="0"/>
               <a:t>La ridenominazione dei registri su un esempio. A sinistra il codice come è scritto: due metà, ciascuna delle quali carica una parola, la incrementa e la memorizza di nuovo, ed entrambe usano t0. La seconda metà riusa il nome, non il valore: è una falsa dipendenza. A destra, dopo la ridenominazione, ogni nuovo valore ha il suo registro fisico, e le due metà non condividono nulla, quindi possono essere eseguite nello stesso momento. I trentadue registri che conoscete sono nomi; il chip ha qualche centinaio di registri.
+DA COMPRENDERE OGGI: i processori superscalari.
 Per il docente: Una falsa dipendenza: lo stesso nome per due valori che non c'entrano l'uno con l'altro. Da p41 a p44 sono numeri inventati di registri fisici. Un core grande ne ha qualche centinaio.</a:t>
             </a:r>
             <a:endParaRPr lang="en-US" dirty="0"/>
@@ -2105,6 +2120,7 @@
             <a:r>
               <a:rPr lang="en-US" dirty="0"/>
               <a:t>Lo stesso ciclo con l'estensione vettoriale. v0 è un registro vettoriale, largo molti byte, riempito di zeri. A ogni giro vsetvli chiede: dei byte ancora da fare, quanti ne entrano in un registro? La risposta va in t2. vse8.v memorizza quel numero di byte con una sola istruzione, e l'indirizzo e il contatore avanzano di t2. Con registri a 128 bit un giro tratta 16 byte: 60 giri invece di 960. Il codice non dichiara mai la larghezza dei registri, quindi lo stesso programma funziona con qualunque larghezza.
+DA COMPRENDERE OGGI: le istruzioni vettoriali.
 Per il docente: L'estensione V, ratificata nel 2021. Sul kit non c'è: l'ESP32-C6 è RV32IMAC. Il codice non dice mai quanto sono larghi i registri: è indipendente dalla lunghezza del vettore (vector-length agnostic), e lo stesso binario usa 128, 256 o 1024 bit. Provato su QEMU a 128, 256, 512 e 1024 bit da tools/tests/vector_qemu.S.</a:t>
             </a:r>
             <a:endParaRPr lang="en-US" dirty="0"/>
@@ -2194,6 +2210,7 @@
             <a:r>
               <a:rPr lang="en-US" dirty="0"/>
               <a:t>Una somma, corsia per corsia. Un registro vettoriale contiene più parole, ciascuna nella sua corsia (lane). vle32.v carica più parole insieme; vadd.vv somma due registri corsia per corsia, così v1 accumula tante somme parziali quante sono le corsie. Alla fine vredsum somma tra loro le corsie in un solo numero. Con i sedici numeri da 1 a 16 il risultato è 136. È la somma parallela che avete visto come figura nella Lezione 04, ora in forma di istruzioni.
+DA COMPRENDERE OGGI: le istruzioni vettoriali.
 Per il docente: La somma parallela delle Lezioni 04 e 20, in RISC-V. tu, tail undisturbed, conserva le somme parziali delle corsie che l'ultimo giro non usa. Provato su QEMU insieme al listato precedente.</a:t>
             </a:r>
             <a:endParaRPr lang="en-US" dirty="0"/>
@@ -2283,6 +2300,7 @@
             <a:r>
               <a:rPr lang="en-US" dirty="0"/>
               <a:t>La mappa di Verm1 su una GPU. La funzione marcata come kernel gira una volta in ogni thread. Ogni thread calcola anzitutto chi è, il suo indice i, dal numero del suo blocco e dalla sua posizione nel blocco; poi, se l'indice sta dentro la mappa, azzera la propria cella. Non c'è un ciclo: ci sono 960 thread. L'ultima riga, sull'host, lancia quattro blocchi di 256 thread. Per 960 byte le due copie costano molto più del lavoro: questo esempio mostra la forma, non un guadagno.
+DA COMPRENDERE OGGI: acceleratori GPU e FPGA.
 Per il docente: CUDA C, nella sua forma abituale da manuale; non compilato per queste slide. L'ultima osservazione è seria: una GPU ripaga quando i dati sono grandi e il lavoro per elemento è reale. Chiedete: per quale dimensione della mappa ne varrebbe la pena?</a:t>
             </a:r>
             <a:endParaRPr lang="en-US" dirty="0"/>
@@ -2372,6 +2390,7 @@
             <a:r>
               <a:rPr lang="en-US" dirty="0"/>
               <a:t>La regola di Verm1 che vieta l'inversione a U, scritta come hardware. Verilog è un linguaggio che descrive circuiti, non sequenze di passi. Il modulo ha due ingressi di due bit, la direzione attuale e quella richiesta, e un'uscita. La riga con assign è un filo sempre vero: l'uscita vale 1 quando lo XOR delle due direzioni è uguale a 10 in binario. Non c'è un prima e un dopo. Sul kit la stessa regola costava tre istruzioni.
+DA COMPRENDERE OGGI: acceleratori GPU e FPGA.
 Per il docente: Un linguaggio di descrizione dell'hardware: Verilog, o VHDL. Non sintetizzato per queste slide. Le xor, li, beq della Parte 2 diventano porte che rispondono in una frazione di nanosecondo, in continuazione. Chiedete agli studenti di disegnare il circuito: refuse = (d1 xor w1) and not (d0 xor w0).</a:t>
             </a:r>
             <a:endParaRPr lang="en-US" dirty="0"/>
@@ -3451,6 +3470,420 @@
           </a:prstGeom>
         </p:spPr>
       </p:pic>
+      <p:sp>
+        <p:nvSpPr>
+          <p:cNvPr id="14" name="Shape 11"/>
+          <p:cNvSpPr/>
+          <p:nvPr/>
+        </p:nvSpPr>
+        <p:spPr>
+          <a:xfrm>
+            <a:off x="8910777" y="91440"/>
+            <a:ext cx="2732278" cy="274320"/>
+          </a:xfrm>
+          <a:prstGeom prst="rect">
+            <a:avLst/>
+          </a:prstGeom>
+          <a:solidFill>
+            <a:srgbClr val="F3E8FF"/>
+          </a:solidFill>
+          <a:ln w="12700">
+            <a:solidFill>
+              <a:srgbClr val="7E22CE"/>
+            </a:solidFill>
+            <a:prstDash val="dash"/>
+          </a:ln>
+        </p:spPr>
+      </p:sp>
+      <p:sp>
+        <p:nvSpPr>
+          <p:cNvPr id="15" name="Shape 12"/>
+          <p:cNvSpPr/>
+          <p:nvPr/>
+        </p:nvSpPr>
+        <p:spPr>
+          <a:xfrm>
+            <a:off x="8938209" y="128016"/>
+            <a:ext cx="45720" cy="45720"/>
+          </a:xfrm>
+          <a:prstGeom prst="rect">
+            <a:avLst/>
+          </a:prstGeom>
+          <a:solidFill>
+            <a:srgbClr val="7E22CE"/>
+          </a:solidFill>
+          <a:ln w="12700">
+            <a:solidFill>
+              <a:srgbClr val="7E22CE"/>
+            </a:solidFill>
+            <a:prstDash val="solid"/>
+          </a:ln>
+        </p:spPr>
+      </p:sp>
+      <p:sp>
+        <p:nvSpPr>
+          <p:cNvPr id="16" name="Shape 13"/>
+          <p:cNvSpPr/>
+          <p:nvPr/>
+        </p:nvSpPr>
+        <p:spPr>
+          <a:xfrm>
+            <a:off x="8938209" y="205740"/>
+            <a:ext cx="45720" cy="45720"/>
+          </a:xfrm>
+          <a:prstGeom prst="rect">
+            <a:avLst/>
+          </a:prstGeom>
+          <a:solidFill>
+            <a:srgbClr val="7E22CE"/>
+          </a:solidFill>
+          <a:ln w="12700">
+            <a:solidFill>
+              <a:srgbClr val="7E22CE"/>
+            </a:solidFill>
+            <a:prstDash val="solid"/>
+          </a:ln>
+        </p:spPr>
+      </p:sp>
+      <p:sp>
+        <p:nvSpPr>
+          <p:cNvPr id="17" name="Shape 14"/>
+          <p:cNvSpPr/>
+          <p:nvPr/>
+        </p:nvSpPr>
+        <p:spPr>
+          <a:xfrm>
+            <a:off x="8938209" y="283464"/>
+            <a:ext cx="45720" cy="45720"/>
+          </a:xfrm>
+          <a:prstGeom prst="rect">
+            <a:avLst/>
+          </a:prstGeom>
+          <a:solidFill>
+            <a:srgbClr val="7E22CE"/>
+          </a:solidFill>
+          <a:ln w="12700">
+            <a:solidFill>
+              <a:srgbClr val="7E22CE"/>
+            </a:solidFill>
+            <a:prstDash val="solid"/>
+          </a:ln>
+        </p:spPr>
+      </p:sp>
+      <p:pic>
+        <p:nvPicPr>
+          <p:cNvPr id="18" name="Image 1" descr="preencoded.png">    </p:cNvPr>
+          <p:cNvPicPr>
+            <a:picLocks noChangeAspect="1"/>
+          </p:cNvPicPr>
+          <p:nvPr/>
+        </p:nvPicPr>
+        <p:blipFill>
+          <a:blip r:embed="rId2"/>
+          <a:stretch>
+            <a:fillRect/>
+          </a:stretch>
+        </p:blipFill>
+        <p:spPr>
+          <a:xfrm>
+            <a:off x="9038793" y="128016"/>
+            <a:ext cx="201168" cy="201168"/>
+          </a:xfrm>
+          <a:prstGeom prst="rect">
+            <a:avLst/>
+          </a:prstGeom>
+        </p:spPr>
+      </p:pic>
+      <p:sp>
+        <p:nvSpPr>
+          <p:cNvPr id="19" name="Text 15"/>
+          <p:cNvSpPr txBox="1"/>
+          <p:nvPr/>
+        </p:nvSpPr>
+        <p:spPr>
+          <a:xfrm>
+            <a:off x="9294825" y="91440"/>
+            <a:ext cx="2311654" cy="274320"/>
+          </a:xfrm>
+          <a:prstGeom prst="rect">
+            <a:avLst/>
+          </a:prstGeom>
+          <a:noFill/>
+          <a:ln/>
+        </p:spPr>
+        <p:txBody>
+          <a:bodyPr wrap="square" lIns="0" tIns="0" rIns="0" bIns="0" rtlCol="0" anchor="ctr"/>
+          <a:lstStyle/>
+          <a:p>
+            <a:pPr indent="0" marL="0">
+              <a:buNone/>
+            </a:pPr>
+            <a:r>
+              <a:rPr lang="en-US" sz="1100" b="1" dirty="0">
+                <a:solidFill>
+                  <a:srgbClr val="6B21A8"/>
+                </a:solidFill>
+                <a:latin typeface="Calibri" pitchFamily="34" charset="0"/>
+                <a:ea typeface="Calibri" pitchFamily="34" charset="-122"/>
+                <a:cs typeface="Calibri" pitchFamily="34" charset="-120"/>
+              </a:rPr>
+              <a:t>DA COMPRENDERE PIÙ AVANTI</a:t>
+            </a:r>
+            <a:endParaRPr lang="en-US" sz="1100" dirty="0"/>
+          </a:p>
+        </p:txBody>
+      </p:sp>
+      <p:sp>
+        <p:nvSpPr>
+          <p:cNvPr id="20" name="Shape 16"/>
+          <p:cNvSpPr/>
+          <p:nvPr/>
+        </p:nvSpPr>
+        <p:spPr>
+          <a:xfrm>
+            <a:off x="6675069" y="91440"/>
+            <a:ext cx="2125980" cy="274320"/>
+          </a:xfrm>
+          <a:prstGeom prst="rect">
+            <a:avLst/>
+          </a:prstGeom>
+          <a:solidFill>
+            <a:srgbClr val="FEF3C7"/>
+          </a:solidFill>
+          <a:ln w="12700">
+            <a:solidFill>
+              <a:srgbClr val="B45309"/>
+            </a:solidFill>
+            <a:prstDash val="solid"/>
+          </a:ln>
+        </p:spPr>
+      </p:sp>
+      <p:sp>
+        <p:nvSpPr>
+          <p:cNvPr id="21" name="Shape 17"/>
+          <p:cNvSpPr/>
+          <p:nvPr/>
+        </p:nvSpPr>
+        <p:spPr>
+          <a:xfrm>
+            <a:off x="6675069" y="91440"/>
+            <a:ext cx="27432" cy="274320"/>
+          </a:xfrm>
+          <a:prstGeom prst="rect">
+            <a:avLst/>
+          </a:prstGeom>
+          <a:solidFill>
+            <a:srgbClr val="B45309"/>
+          </a:solidFill>
+          <a:ln w="12700">
+            <a:solidFill>
+              <a:srgbClr val="B45309"/>
+            </a:solidFill>
+            <a:prstDash val="solid"/>
+          </a:ln>
+        </p:spPr>
+      </p:sp>
+      <p:sp>
+        <p:nvSpPr>
+          <p:cNvPr id="22" name="Shape 18"/>
+          <p:cNvSpPr/>
+          <p:nvPr/>
+        </p:nvSpPr>
+        <p:spPr>
+          <a:xfrm>
+            <a:off x="6729933" y="91440"/>
+            <a:ext cx="27432" cy="274320"/>
+          </a:xfrm>
+          <a:prstGeom prst="rect">
+            <a:avLst/>
+          </a:prstGeom>
+          <a:solidFill>
+            <a:srgbClr val="B45309"/>
+          </a:solidFill>
+          <a:ln w="12700">
+            <a:solidFill>
+              <a:srgbClr val="B45309"/>
+            </a:solidFill>
+            <a:prstDash val="solid"/>
+          </a:ln>
+        </p:spPr>
+      </p:sp>
+      <p:pic>
+        <p:nvPicPr>
+          <p:cNvPr id="23" name="Image 2" descr="preencoded.png">    </p:cNvPr>
+          <p:cNvPicPr>
+            <a:picLocks noChangeAspect="1"/>
+          </p:cNvPicPr>
+          <p:nvPr/>
+        </p:nvPicPr>
+        <p:blipFill>
+          <a:blip r:embed="rId3"/>
+          <a:stretch>
+            <a:fillRect/>
+          </a:stretch>
+        </p:blipFill>
+        <p:spPr>
+          <a:xfrm>
+            <a:off x="6803085" y="128016"/>
+            <a:ext cx="201168" cy="201168"/>
+          </a:xfrm>
+          <a:prstGeom prst="rect">
+            <a:avLst/>
+          </a:prstGeom>
+        </p:spPr>
+      </p:pic>
+      <p:sp>
+        <p:nvSpPr>
+          <p:cNvPr id="24" name="Text 19"/>
+          <p:cNvSpPr txBox="1"/>
+          <p:nvPr/>
+        </p:nvSpPr>
+        <p:spPr>
+          <a:xfrm>
+            <a:off x="7059117" y="91440"/>
+            <a:ext cx="1705356" cy="274320"/>
+          </a:xfrm>
+          <a:prstGeom prst="rect">
+            <a:avLst/>
+          </a:prstGeom>
+          <a:noFill/>
+          <a:ln/>
+        </p:spPr>
+        <p:txBody>
+          <a:bodyPr wrap="square" lIns="0" tIns="0" rIns="0" bIns="0" rtlCol="0" anchor="ctr"/>
+          <a:lstStyle/>
+          <a:p>
+            <a:pPr indent="0" marL="0">
+              <a:buNone/>
+            </a:pPr>
+            <a:r>
+              <a:rPr lang="en-US" sz="1100" b="1" dirty="0">
+                <a:solidFill>
+                  <a:srgbClr val="92400E"/>
+                </a:solidFill>
+                <a:latin typeface="Calibri" pitchFamily="34" charset="0"/>
+                <a:ea typeface="Calibri" pitchFamily="34" charset="-122"/>
+                <a:cs typeface="Calibri" pitchFamily="34" charset="-120"/>
+              </a:rPr>
+              <a:t>DA UTILIZZARE OGGI</a:t>
+            </a:r>
+            <a:endParaRPr lang="en-US" sz="1100" dirty="0"/>
+          </a:p>
+        </p:txBody>
+      </p:sp>
+      <p:sp>
+        <p:nvSpPr>
+          <p:cNvPr id="25" name="Shape 20"/>
+          <p:cNvSpPr/>
+          <p:nvPr/>
+        </p:nvSpPr>
+        <p:spPr>
+          <a:xfrm>
+            <a:off x="4352747" y="91440"/>
+            <a:ext cx="2212594" cy="274320"/>
+          </a:xfrm>
+          <a:prstGeom prst="rect">
+            <a:avLst/>
+          </a:prstGeom>
+          <a:solidFill>
+            <a:srgbClr val="E0F2FE"/>
+          </a:solidFill>
+          <a:ln w="12700">
+            <a:solidFill>
+              <a:srgbClr val="0369A1"/>
+            </a:solidFill>
+            <a:prstDash val="solid"/>
+          </a:ln>
+        </p:spPr>
+      </p:sp>
+      <p:sp>
+        <p:nvSpPr>
+          <p:cNvPr id="26" name="Shape 21"/>
+          <p:cNvSpPr/>
+          <p:nvPr/>
+        </p:nvSpPr>
+        <p:spPr>
+          <a:xfrm>
+            <a:off x="4352747" y="91440"/>
+            <a:ext cx="73152" cy="274320"/>
+          </a:xfrm>
+          <a:prstGeom prst="rect">
+            <a:avLst/>
+          </a:prstGeom>
+          <a:solidFill>
+            <a:srgbClr val="0369A1"/>
+          </a:solidFill>
+          <a:ln w="12700">
+            <a:solidFill>
+              <a:srgbClr val="0369A1"/>
+            </a:solidFill>
+            <a:prstDash val="solid"/>
+          </a:ln>
+        </p:spPr>
+      </p:sp>
+      <p:pic>
+        <p:nvPicPr>
+          <p:cNvPr id="27" name="Image 3" descr="preencoded.png">    </p:cNvPr>
+          <p:cNvPicPr>
+            <a:picLocks noChangeAspect="1"/>
+          </p:cNvPicPr>
+          <p:nvPr/>
+        </p:nvPicPr>
+        <p:blipFill>
+          <a:blip r:embed="rId4"/>
+          <a:stretch>
+            <a:fillRect/>
+          </a:stretch>
+        </p:blipFill>
+        <p:spPr>
+          <a:xfrm>
+            <a:off x="4480763" y="128016"/>
+            <a:ext cx="201168" cy="201168"/>
+          </a:xfrm>
+          <a:prstGeom prst="rect">
+            <a:avLst/>
+          </a:prstGeom>
+        </p:spPr>
+      </p:pic>
+      <p:sp>
+        <p:nvSpPr>
+          <p:cNvPr id="28" name="Text 22"/>
+          <p:cNvSpPr txBox="1"/>
+          <p:nvPr/>
+        </p:nvSpPr>
+        <p:spPr>
+          <a:xfrm>
+            <a:off x="4736795" y="91440"/>
+            <a:ext cx="1791970" cy="274320"/>
+          </a:xfrm>
+          <a:prstGeom prst="rect">
+            <a:avLst/>
+          </a:prstGeom>
+          <a:noFill/>
+          <a:ln/>
+        </p:spPr>
+        <p:txBody>
+          <a:bodyPr wrap="square" lIns="0" tIns="0" rIns="0" bIns="0" rtlCol="0" anchor="ctr"/>
+          <a:lstStyle/>
+          <a:p>
+            <a:pPr indent="0" marL="0">
+              <a:buNone/>
+            </a:pPr>
+            <a:r>
+              <a:rPr lang="en-US" sz="1100" b="1" dirty="0">
+                <a:solidFill>
+                  <a:srgbClr val="075985"/>
+                </a:solidFill>
+                <a:latin typeface="Calibri" pitchFamily="34" charset="0"/>
+                <a:ea typeface="Calibri" pitchFamily="34" charset="-122"/>
+                <a:cs typeface="Calibri" pitchFamily="34" charset="-120"/>
+              </a:rPr>
+              <a:t>DA COMPRENDERE OGGI</a:t>
+            </a:r>
+            <a:endParaRPr lang="en-US" sz="1100" dirty="0"/>
+          </a:p>
+        </p:txBody>
+      </p:sp>
       <p:sp>
         <p:nvSpPr>
           <p:cNvPr id="25" name="Slide Number Placeholder 0"/>
@@ -4873,6 +5306,133 @@
       </p:sp>
       <p:sp>
         <p:nvSpPr>
+          <p:cNvPr id="5" name="Shape 2"/>
+          <p:cNvSpPr/>
+          <p:nvPr/>
+        </p:nvSpPr>
+        <p:spPr>
+          <a:xfrm>
+            <a:off x="7723327" y="91440"/>
+            <a:ext cx="3919728" cy="274320"/>
+          </a:xfrm>
+          <a:prstGeom prst="rect">
+            <a:avLst/>
+          </a:prstGeom>
+          <a:solidFill>
+            <a:srgbClr val="E0F2FE"/>
+          </a:solidFill>
+          <a:ln w="12700">
+            <a:solidFill>
+              <a:srgbClr val="0369A1"/>
+            </a:solidFill>
+            <a:prstDash val="solid"/>
+          </a:ln>
+        </p:spPr>
+      </p:sp>
+      <p:sp>
+        <p:nvSpPr>
+          <p:cNvPr id="6" name="Shape 3"/>
+          <p:cNvSpPr/>
+          <p:nvPr/>
+        </p:nvSpPr>
+        <p:spPr>
+          <a:xfrm>
+            <a:off x="7723327" y="91440"/>
+            <a:ext cx="73152" cy="274320"/>
+          </a:xfrm>
+          <a:prstGeom prst="rect">
+            <a:avLst/>
+          </a:prstGeom>
+          <a:solidFill>
+            <a:srgbClr val="0369A1"/>
+          </a:solidFill>
+          <a:ln w="12700">
+            <a:solidFill>
+              <a:srgbClr val="0369A1"/>
+            </a:solidFill>
+            <a:prstDash val="solid"/>
+          </a:ln>
+        </p:spPr>
+      </p:sp>
+      <p:pic>
+        <p:nvPicPr>
+          <p:cNvPr id="7" name="Image 0" descr="preencoded.png">    </p:cNvPr>
+          <p:cNvPicPr>
+            <a:picLocks noChangeAspect="1"/>
+          </p:cNvPicPr>
+          <p:nvPr/>
+        </p:nvPicPr>
+        <p:blipFill>
+          <a:blip r:embed="rId1"/>
+          <a:stretch>
+            <a:fillRect/>
+          </a:stretch>
+        </p:blipFill>
+        <p:spPr>
+          <a:xfrm>
+            <a:off x="7851343" y="128016"/>
+            <a:ext cx="201168" cy="201168"/>
+          </a:xfrm>
+          <a:prstGeom prst="rect">
+            <a:avLst/>
+          </a:prstGeom>
+        </p:spPr>
+      </p:pic>
+      <p:sp>
+        <p:nvSpPr>
+          <p:cNvPr id="8" name="Text 4"/>
+          <p:cNvSpPr txBox="1"/>
+          <p:nvPr/>
+        </p:nvSpPr>
+        <p:spPr>
+          <a:xfrm>
+            <a:off x="8107375" y="91440"/>
+            <a:ext cx="3499104" cy="274320"/>
+          </a:xfrm>
+          <a:prstGeom prst="rect">
+            <a:avLst/>
+          </a:prstGeom>
+          <a:noFill/>
+          <a:ln/>
+        </p:spPr>
+        <p:txBody>
+          <a:bodyPr wrap="square" lIns="0" tIns="0" rIns="0" bIns="0" rtlCol="0" anchor="ctr"/>
+          <a:lstStyle/>
+          <a:p>
+            <a:pPr indent="0" marL="0">
+              <a:buNone/>
+            </a:pPr>
+            <a:r>
+              <a:rPr lang="en-US" sz="1100" b="1" dirty="0">
+                <a:solidFill>
+                  <a:srgbClr val="075985"/>
+                </a:solidFill>
+                <a:latin typeface="Calibri" pitchFamily="34" charset="0"/>
+                <a:ea typeface="Calibri" pitchFamily="34" charset="-122"/>
+                <a:cs typeface="Calibri" pitchFamily="34" charset="-120"/>
+              </a:rPr>
+              <a:t>DA COMPRENDERE OGGI</a:t>
+            </a:r>
+            <a:pPr indent="0" marL="0">
+              <a:buNone/>
+            </a:pPr>
+            <a:r>
+              <a:rPr lang="en-US" sz="1100" dirty="0">
+                <a:solidFill>
+                  <a:srgbClr val="075985"/>
+                </a:solidFill>
+                <a:latin typeface="Calibri" pitchFamily="34" charset="0"/>
+                <a:ea typeface="Calibri" pitchFamily="34" charset="-122"/>
+                <a:cs typeface="Calibri" pitchFamily="34" charset="-120"/>
+              </a:rPr>
+              <a:t> · acceleratori GPU e FPGA</a:t>
+            </a:r>
+            <a:endParaRPr lang="en-US" sz="1100" dirty="0"/>
+          </a:p>
+        </p:txBody>
+      </p:sp>
+      <p:sp>
+        <p:nvSpPr>
           <p:cNvPr id="25" name="Slide Number Placeholder 0"/>
           <p:cNvSpPr>
             <a:spLocks noGrp="1"/>
@@ -5373,6 +5933,158 @@
       </p:sp>
       <p:sp>
         <p:nvSpPr>
+          <p:cNvPr id="5" name="Shape 3"/>
+          <p:cNvSpPr/>
+          <p:nvPr/>
+        </p:nvSpPr>
+        <p:spPr>
+          <a:xfrm>
+            <a:off x="7941259" y="91440"/>
+            <a:ext cx="3701796" cy="274320"/>
+          </a:xfrm>
+          <a:prstGeom prst="rect">
+            <a:avLst/>
+          </a:prstGeom>
+          <a:solidFill>
+            <a:srgbClr val="FEF3C7"/>
+          </a:solidFill>
+          <a:ln w="12700">
+            <a:solidFill>
+              <a:srgbClr val="B45309"/>
+            </a:solidFill>
+            <a:prstDash val="solid"/>
+          </a:ln>
+        </p:spPr>
+      </p:sp>
+      <p:sp>
+        <p:nvSpPr>
+          <p:cNvPr id="6" name="Shape 4"/>
+          <p:cNvSpPr/>
+          <p:nvPr/>
+        </p:nvSpPr>
+        <p:spPr>
+          <a:xfrm>
+            <a:off x="7941259" y="91440"/>
+            <a:ext cx="27432" cy="274320"/>
+          </a:xfrm>
+          <a:prstGeom prst="rect">
+            <a:avLst/>
+          </a:prstGeom>
+          <a:solidFill>
+            <a:srgbClr val="B45309"/>
+          </a:solidFill>
+          <a:ln w="12700">
+            <a:solidFill>
+              <a:srgbClr val="B45309"/>
+            </a:solidFill>
+            <a:prstDash val="solid"/>
+          </a:ln>
+        </p:spPr>
+      </p:sp>
+      <p:sp>
+        <p:nvSpPr>
+          <p:cNvPr id="7" name="Shape 5"/>
+          <p:cNvSpPr/>
+          <p:nvPr/>
+        </p:nvSpPr>
+        <p:spPr>
+          <a:xfrm>
+            <a:off x="7996123" y="91440"/>
+            <a:ext cx="27432" cy="274320"/>
+          </a:xfrm>
+          <a:prstGeom prst="rect">
+            <a:avLst/>
+          </a:prstGeom>
+          <a:solidFill>
+            <a:srgbClr val="B45309"/>
+          </a:solidFill>
+          <a:ln w="12700">
+            <a:solidFill>
+              <a:srgbClr val="B45309"/>
+            </a:solidFill>
+            <a:prstDash val="solid"/>
+          </a:ln>
+        </p:spPr>
+      </p:sp>
+      <p:pic>
+        <p:nvPicPr>
+          <p:cNvPr id="8" name="Image 0" descr="preencoded.png">    </p:cNvPr>
+          <p:cNvPicPr>
+            <a:picLocks noChangeAspect="1"/>
+          </p:cNvPicPr>
+          <p:nvPr/>
+        </p:nvPicPr>
+        <p:blipFill>
+          <a:blip r:embed="rId1"/>
+          <a:stretch>
+            <a:fillRect/>
+          </a:stretch>
+        </p:blipFill>
+        <p:spPr>
+          <a:xfrm>
+            <a:off x="8069275" y="128016"/>
+            <a:ext cx="201168" cy="201168"/>
+          </a:xfrm>
+          <a:prstGeom prst="rect">
+            <a:avLst/>
+          </a:prstGeom>
+        </p:spPr>
+      </p:pic>
+      <p:sp>
+        <p:nvSpPr>
+          <p:cNvPr id="9" name="Text 6"/>
+          <p:cNvSpPr txBox="1"/>
+          <p:nvPr/>
+        </p:nvSpPr>
+        <p:spPr>
+          <a:xfrm>
+            <a:off x="8325307" y="91440"/>
+            <a:ext cx="3281172" cy="274320"/>
+          </a:xfrm>
+          <a:prstGeom prst="rect">
+            <a:avLst/>
+          </a:prstGeom>
+          <a:noFill/>
+          <a:ln/>
+        </p:spPr>
+        <p:txBody>
+          <a:bodyPr wrap="square" lIns="0" tIns="0" rIns="0" bIns="0" rtlCol="0" anchor="ctr"/>
+          <a:lstStyle/>
+          <a:p>
+            <a:pPr indent="0" marL="0">
+              <a:buNone/>
+            </a:pPr>
+            <a:r>
+              <a:rPr lang="en-US" sz="1100" b="1" dirty="0">
+                <a:solidFill>
+                  <a:srgbClr val="92400E"/>
+                </a:solidFill>
+                <a:latin typeface="Calibri" pitchFamily="34" charset="0"/>
+                <a:ea typeface="Calibri" pitchFamily="34" charset="-122"/>
+                <a:cs typeface="Calibri" pitchFamily="34" charset="-120"/>
+              </a:rPr>
+              <a:t>DA UTILIZZARE OGGI</a:t>
+            </a:r>
+            <a:pPr indent="0" marL="0">
+              <a:buNone/>
+            </a:pPr>
+            <a:r>
+              <a:rPr lang="en-US" sz="1100" dirty="0">
+                <a:solidFill>
+                  <a:srgbClr val="92400E"/>
+                </a:solidFill>
+                <a:latin typeface="Calibri" pitchFamily="34" charset="0"/>
+                <a:ea typeface="Calibri" pitchFamily="34" charset="-122"/>
+                <a:cs typeface="Calibri" pitchFamily="34" charset="-120"/>
+              </a:rPr>
+              <a:t> · il programma completo</a:t>
+            </a:r>
+            <a:endParaRPr lang="en-US" sz="1100" dirty="0"/>
+          </a:p>
+        </p:txBody>
+      </p:sp>
+      <p:sp>
+        <p:nvSpPr>
           <p:cNvPr id="25" name="Slide Number Placeholder 0"/>
           <p:cNvSpPr>
             <a:spLocks noGrp="1"/>
@@ -5909,6 +6621,158 @@
       </p:sp>
       <p:sp>
         <p:nvSpPr>
+          <p:cNvPr id="5" name="Shape 3"/>
+          <p:cNvSpPr/>
+          <p:nvPr/>
+        </p:nvSpPr>
+        <p:spPr>
+          <a:xfrm>
+            <a:off x="7941259" y="91440"/>
+            <a:ext cx="3701796" cy="274320"/>
+          </a:xfrm>
+          <a:prstGeom prst="rect">
+            <a:avLst/>
+          </a:prstGeom>
+          <a:solidFill>
+            <a:srgbClr val="FEF3C7"/>
+          </a:solidFill>
+          <a:ln w="12700">
+            <a:solidFill>
+              <a:srgbClr val="B45309"/>
+            </a:solidFill>
+            <a:prstDash val="solid"/>
+          </a:ln>
+        </p:spPr>
+      </p:sp>
+      <p:sp>
+        <p:nvSpPr>
+          <p:cNvPr id="6" name="Shape 4"/>
+          <p:cNvSpPr/>
+          <p:nvPr/>
+        </p:nvSpPr>
+        <p:spPr>
+          <a:xfrm>
+            <a:off x="7941259" y="91440"/>
+            <a:ext cx="27432" cy="274320"/>
+          </a:xfrm>
+          <a:prstGeom prst="rect">
+            <a:avLst/>
+          </a:prstGeom>
+          <a:solidFill>
+            <a:srgbClr val="B45309"/>
+          </a:solidFill>
+          <a:ln w="12700">
+            <a:solidFill>
+              <a:srgbClr val="B45309"/>
+            </a:solidFill>
+            <a:prstDash val="solid"/>
+          </a:ln>
+        </p:spPr>
+      </p:sp>
+      <p:sp>
+        <p:nvSpPr>
+          <p:cNvPr id="7" name="Shape 5"/>
+          <p:cNvSpPr/>
+          <p:nvPr/>
+        </p:nvSpPr>
+        <p:spPr>
+          <a:xfrm>
+            <a:off x="7996123" y="91440"/>
+            <a:ext cx="27432" cy="274320"/>
+          </a:xfrm>
+          <a:prstGeom prst="rect">
+            <a:avLst/>
+          </a:prstGeom>
+          <a:solidFill>
+            <a:srgbClr val="B45309"/>
+          </a:solidFill>
+          <a:ln w="12700">
+            <a:solidFill>
+              <a:srgbClr val="B45309"/>
+            </a:solidFill>
+            <a:prstDash val="solid"/>
+          </a:ln>
+        </p:spPr>
+      </p:sp>
+      <p:pic>
+        <p:nvPicPr>
+          <p:cNvPr id="8" name="Image 0" descr="preencoded.png">    </p:cNvPr>
+          <p:cNvPicPr>
+            <a:picLocks noChangeAspect="1"/>
+          </p:cNvPicPr>
+          <p:nvPr/>
+        </p:nvPicPr>
+        <p:blipFill>
+          <a:blip r:embed="rId1"/>
+          <a:stretch>
+            <a:fillRect/>
+          </a:stretch>
+        </p:blipFill>
+        <p:spPr>
+          <a:xfrm>
+            <a:off x="8069275" y="128016"/>
+            <a:ext cx="201168" cy="201168"/>
+          </a:xfrm>
+          <a:prstGeom prst="rect">
+            <a:avLst/>
+          </a:prstGeom>
+        </p:spPr>
+      </p:pic>
+      <p:sp>
+        <p:nvSpPr>
+          <p:cNvPr id="9" name="Text 6"/>
+          <p:cNvSpPr txBox="1"/>
+          <p:nvPr/>
+        </p:nvSpPr>
+        <p:spPr>
+          <a:xfrm>
+            <a:off x="8325307" y="91440"/>
+            <a:ext cx="3281172" cy="274320"/>
+          </a:xfrm>
+          <a:prstGeom prst="rect">
+            <a:avLst/>
+          </a:prstGeom>
+          <a:noFill/>
+          <a:ln/>
+        </p:spPr>
+        <p:txBody>
+          <a:bodyPr wrap="square" lIns="0" tIns="0" rIns="0" bIns="0" rtlCol="0" anchor="ctr"/>
+          <a:lstStyle/>
+          <a:p>
+            <a:pPr indent="0" marL="0">
+              <a:buNone/>
+            </a:pPr>
+            <a:r>
+              <a:rPr lang="en-US" sz="1100" b="1" dirty="0">
+                <a:solidFill>
+                  <a:srgbClr val="92400E"/>
+                </a:solidFill>
+                <a:latin typeface="Calibri" pitchFamily="34" charset="0"/>
+                <a:ea typeface="Calibri" pitchFamily="34" charset="-122"/>
+                <a:cs typeface="Calibri" pitchFamily="34" charset="-120"/>
+              </a:rPr>
+              <a:t>DA UTILIZZARE OGGI</a:t>
+            </a:r>
+            <a:pPr indent="0" marL="0">
+              <a:buNone/>
+            </a:pPr>
+            <a:r>
+              <a:rPr lang="en-US" sz="1100" dirty="0">
+                <a:solidFill>
+                  <a:srgbClr val="92400E"/>
+                </a:solidFill>
+                <a:latin typeface="Calibri" pitchFamily="34" charset="0"/>
+                <a:ea typeface="Calibri" pitchFamily="34" charset="-122"/>
+                <a:cs typeface="Calibri" pitchFamily="34" charset="-120"/>
+              </a:rPr>
+              <a:t> · il programma completo</a:t>
+            </a:r>
+            <a:endParaRPr lang="en-US" sz="1100" dirty="0"/>
+          </a:p>
+        </p:txBody>
+      </p:sp>
+      <p:sp>
+        <p:nvSpPr>
           <p:cNvPr id="25" name="Slide Number Placeholder 0"/>
           <p:cNvSpPr>
             <a:spLocks noGrp="1"/>
@@ -6273,6 +7137,158 @@
       </p:sp>
       <p:sp>
         <p:nvSpPr>
+          <p:cNvPr id="5" name="Shape 3"/>
+          <p:cNvSpPr/>
+          <p:nvPr/>
+        </p:nvSpPr>
+        <p:spPr>
+          <a:xfrm>
+            <a:off x="7941259" y="91440"/>
+            <a:ext cx="3701796" cy="274320"/>
+          </a:xfrm>
+          <a:prstGeom prst="rect">
+            <a:avLst/>
+          </a:prstGeom>
+          <a:solidFill>
+            <a:srgbClr val="FEF3C7"/>
+          </a:solidFill>
+          <a:ln w="12700">
+            <a:solidFill>
+              <a:srgbClr val="B45309"/>
+            </a:solidFill>
+            <a:prstDash val="solid"/>
+          </a:ln>
+        </p:spPr>
+      </p:sp>
+      <p:sp>
+        <p:nvSpPr>
+          <p:cNvPr id="6" name="Shape 4"/>
+          <p:cNvSpPr/>
+          <p:nvPr/>
+        </p:nvSpPr>
+        <p:spPr>
+          <a:xfrm>
+            <a:off x="7941259" y="91440"/>
+            <a:ext cx="27432" cy="274320"/>
+          </a:xfrm>
+          <a:prstGeom prst="rect">
+            <a:avLst/>
+          </a:prstGeom>
+          <a:solidFill>
+            <a:srgbClr val="B45309"/>
+          </a:solidFill>
+          <a:ln w="12700">
+            <a:solidFill>
+              <a:srgbClr val="B45309"/>
+            </a:solidFill>
+            <a:prstDash val="solid"/>
+          </a:ln>
+        </p:spPr>
+      </p:sp>
+      <p:sp>
+        <p:nvSpPr>
+          <p:cNvPr id="7" name="Shape 5"/>
+          <p:cNvSpPr/>
+          <p:nvPr/>
+        </p:nvSpPr>
+        <p:spPr>
+          <a:xfrm>
+            <a:off x="7996123" y="91440"/>
+            <a:ext cx="27432" cy="274320"/>
+          </a:xfrm>
+          <a:prstGeom prst="rect">
+            <a:avLst/>
+          </a:prstGeom>
+          <a:solidFill>
+            <a:srgbClr val="B45309"/>
+          </a:solidFill>
+          <a:ln w="12700">
+            <a:solidFill>
+              <a:srgbClr val="B45309"/>
+            </a:solidFill>
+            <a:prstDash val="solid"/>
+          </a:ln>
+        </p:spPr>
+      </p:sp>
+      <p:pic>
+        <p:nvPicPr>
+          <p:cNvPr id="8" name="Image 0" descr="preencoded.png">    </p:cNvPr>
+          <p:cNvPicPr>
+            <a:picLocks noChangeAspect="1"/>
+          </p:cNvPicPr>
+          <p:nvPr/>
+        </p:nvPicPr>
+        <p:blipFill>
+          <a:blip r:embed="rId1"/>
+          <a:stretch>
+            <a:fillRect/>
+          </a:stretch>
+        </p:blipFill>
+        <p:spPr>
+          <a:xfrm>
+            <a:off x="8069275" y="128016"/>
+            <a:ext cx="201168" cy="201168"/>
+          </a:xfrm>
+          <a:prstGeom prst="rect">
+            <a:avLst/>
+          </a:prstGeom>
+        </p:spPr>
+      </p:pic>
+      <p:sp>
+        <p:nvSpPr>
+          <p:cNvPr id="9" name="Text 6"/>
+          <p:cNvSpPr txBox="1"/>
+          <p:nvPr/>
+        </p:nvSpPr>
+        <p:spPr>
+          <a:xfrm>
+            <a:off x="8325307" y="91440"/>
+            <a:ext cx="3281172" cy="274320"/>
+          </a:xfrm>
+          <a:prstGeom prst="rect">
+            <a:avLst/>
+          </a:prstGeom>
+          <a:noFill/>
+          <a:ln/>
+        </p:spPr>
+        <p:txBody>
+          <a:bodyPr wrap="square" lIns="0" tIns="0" rIns="0" bIns="0" rtlCol="0" anchor="ctr"/>
+          <a:lstStyle/>
+          <a:p>
+            <a:pPr indent="0" marL="0">
+              <a:buNone/>
+            </a:pPr>
+            <a:r>
+              <a:rPr lang="en-US" sz="1100" b="1" dirty="0">
+                <a:solidFill>
+                  <a:srgbClr val="92400E"/>
+                </a:solidFill>
+                <a:latin typeface="Calibri" pitchFamily="34" charset="0"/>
+                <a:ea typeface="Calibri" pitchFamily="34" charset="-122"/>
+                <a:cs typeface="Calibri" pitchFamily="34" charset="-120"/>
+              </a:rPr>
+              <a:t>DA UTILIZZARE OGGI</a:t>
+            </a:r>
+            <a:pPr indent="0" marL="0">
+              <a:buNone/>
+            </a:pPr>
+            <a:r>
+              <a:rPr lang="en-US" sz="1100" dirty="0">
+                <a:solidFill>
+                  <a:srgbClr val="92400E"/>
+                </a:solidFill>
+                <a:latin typeface="Calibri" pitchFamily="34" charset="0"/>
+                <a:ea typeface="Calibri" pitchFamily="34" charset="-122"/>
+                <a:cs typeface="Calibri" pitchFamily="34" charset="-120"/>
+              </a:rPr>
+              <a:t> · il programma completo</a:t>
+            </a:r>
+            <a:endParaRPr lang="en-US" sz="1100" dirty="0"/>
+          </a:p>
+        </p:txBody>
+      </p:sp>
+      <p:sp>
+        <p:nvSpPr>
           <p:cNvPr id="25" name="Slide Number Placeholder 0"/>
           <p:cNvSpPr>
             <a:spLocks noGrp="1"/>
@@ -6810,6 +7826,158 @@
       </p:sp>
       <p:sp>
         <p:nvSpPr>
+          <p:cNvPr id="5" name="Shape 3"/>
+          <p:cNvSpPr/>
+          <p:nvPr/>
+        </p:nvSpPr>
+        <p:spPr>
+          <a:xfrm>
+            <a:off x="7941259" y="91440"/>
+            <a:ext cx="3701796" cy="274320"/>
+          </a:xfrm>
+          <a:prstGeom prst="rect">
+            <a:avLst/>
+          </a:prstGeom>
+          <a:solidFill>
+            <a:srgbClr val="FEF3C7"/>
+          </a:solidFill>
+          <a:ln w="12700">
+            <a:solidFill>
+              <a:srgbClr val="B45309"/>
+            </a:solidFill>
+            <a:prstDash val="solid"/>
+          </a:ln>
+        </p:spPr>
+      </p:sp>
+      <p:sp>
+        <p:nvSpPr>
+          <p:cNvPr id="6" name="Shape 4"/>
+          <p:cNvSpPr/>
+          <p:nvPr/>
+        </p:nvSpPr>
+        <p:spPr>
+          <a:xfrm>
+            <a:off x="7941259" y="91440"/>
+            <a:ext cx="27432" cy="274320"/>
+          </a:xfrm>
+          <a:prstGeom prst="rect">
+            <a:avLst/>
+          </a:prstGeom>
+          <a:solidFill>
+            <a:srgbClr val="B45309"/>
+          </a:solidFill>
+          <a:ln w="12700">
+            <a:solidFill>
+              <a:srgbClr val="B45309"/>
+            </a:solidFill>
+            <a:prstDash val="solid"/>
+          </a:ln>
+        </p:spPr>
+      </p:sp>
+      <p:sp>
+        <p:nvSpPr>
+          <p:cNvPr id="7" name="Shape 5"/>
+          <p:cNvSpPr/>
+          <p:nvPr/>
+        </p:nvSpPr>
+        <p:spPr>
+          <a:xfrm>
+            <a:off x="7996123" y="91440"/>
+            <a:ext cx="27432" cy="274320"/>
+          </a:xfrm>
+          <a:prstGeom prst="rect">
+            <a:avLst/>
+          </a:prstGeom>
+          <a:solidFill>
+            <a:srgbClr val="B45309"/>
+          </a:solidFill>
+          <a:ln w="12700">
+            <a:solidFill>
+              <a:srgbClr val="B45309"/>
+            </a:solidFill>
+            <a:prstDash val="solid"/>
+          </a:ln>
+        </p:spPr>
+      </p:sp>
+      <p:pic>
+        <p:nvPicPr>
+          <p:cNvPr id="8" name="Image 0" descr="preencoded.png">    </p:cNvPr>
+          <p:cNvPicPr>
+            <a:picLocks noChangeAspect="1"/>
+          </p:cNvPicPr>
+          <p:nvPr/>
+        </p:nvPicPr>
+        <p:blipFill>
+          <a:blip r:embed="rId1"/>
+          <a:stretch>
+            <a:fillRect/>
+          </a:stretch>
+        </p:blipFill>
+        <p:spPr>
+          <a:xfrm>
+            <a:off x="8069275" y="128016"/>
+            <a:ext cx="201168" cy="201168"/>
+          </a:xfrm>
+          <a:prstGeom prst="rect">
+            <a:avLst/>
+          </a:prstGeom>
+        </p:spPr>
+      </p:pic>
+      <p:sp>
+        <p:nvSpPr>
+          <p:cNvPr id="9" name="Text 6"/>
+          <p:cNvSpPr txBox="1"/>
+          <p:nvPr/>
+        </p:nvSpPr>
+        <p:spPr>
+          <a:xfrm>
+            <a:off x="8325307" y="91440"/>
+            <a:ext cx="3281172" cy="274320"/>
+          </a:xfrm>
+          <a:prstGeom prst="rect">
+            <a:avLst/>
+          </a:prstGeom>
+          <a:noFill/>
+          <a:ln/>
+        </p:spPr>
+        <p:txBody>
+          <a:bodyPr wrap="square" lIns="0" tIns="0" rIns="0" bIns="0" rtlCol="0" anchor="ctr"/>
+          <a:lstStyle/>
+          <a:p>
+            <a:pPr indent="0" marL="0">
+              <a:buNone/>
+            </a:pPr>
+            <a:r>
+              <a:rPr lang="en-US" sz="1100" b="1" dirty="0">
+                <a:solidFill>
+                  <a:srgbClr val="92400E"/>
+                </a:solidFill>
+                <a:latin typeface="Calibri" pitchFamily="34" charset="0"/>
+                <a:ea typeface="Calibri" pitchFamily="34" charset="-122"/>
+                <a:cs typeface="Calibri" pitchFamily="34" charset="-120"/>
+              </a:rPr>
+              <a:t>DA UTILIZZARE OGGI</a:t>
+            </a:r>
+            <a:pPr indent="0" marL="0">
+              <a:buNone/>
+            </a:pPr>
+            <a:r>
+              <a:rPr lang="en-US" sz="1100" dirty="0">
+                <a:solidFill>
+                  <a:srgbClr val="92400E"/>
+                </a:solidFill>
+                <a:latin typeface="Calibri" pitchFamily="34" charset="0"/>
+                <a:ea typeface="Calibri" pitchFamily="34" charset="-122"/>
+                <a:cs typeface="Calibri" pitchFamily="34" charset="-120"/>
+              </a:rPr>
+              <a:t> · il programma completo</a:t>
+            </a:r>
+            <a:endParaRPr lang="en-US" sz="1100" dirty="0"/>
+          </a:p>
+        </p:txBody>
+      </p:sp>
+      <p:sp>
+        <p:nvSpPr>
           <p:cNvPr id="25" name="Slide Number Placeholder 0"/>
           <p:cNvSpPr>
             <a:spLocks noGrp="1"/>
@@ -7963,6 +9131,158 @@
       </p:sp>
       <p:sp>
         <p:nvSpPr>
+          <p:cNvPr id="17" name="Shape 15"/>
+          <p:cNvSpPr/>
+          <p:nvPr/>
+        </p:nvSpPr>
+        <p:spPr>
+          <a:xfrm>
+            <a:off x="7875600" y="91440"/>
+            <a:ext cx="3767455" cy="274320"/>
+          </a:xfrm>
+          <a:prstGeom prst="rect">
+            <a:avLst/>
+          </a:prstGeom>
+          <a:solidFill>
+            <a:srgbClr val="FEF3C7"/>
+          </a:solidFill>
+          <a:ln w="12700">
+            <a:solidFill>
+              <a:srgbClr val="B45309"/>
+            </a:solidFill>
+            <a:prstDash val="solid"/>
+          </a:ln>
+        </p:spPr>
+      </p:sp>
+      <p:sp>
+        <p:nvSpPr>
+          <p:cNvPr id="18" name="Shape 16"/>
+          <p:cNvSpPr/>
+          <p:nvPr/>
+        </p:nvSpPr>
+        <p:spPr>
+          <a:xfrm>
+            <a:off x="7875600" y="91440"/>
+            <a:ext cx="27432" cy="274320"/>
+          </a:xfrm>
+          <a:prstGeom prst="rect">
+            <a:avLst/>
+          </a:prstGeom>
+          <a:solidFill>
+            <a:srgbClr val="B45309"/>
+          </a:solidFill>
+          <a:ln w="12700">
+            <a:solidFill>
+              <a:srgbClr val="B45309"/>
+            </a:solidFill>
+            <a:prstDash val="solid"/>
+          </a:ln>
+        </p:spPr>
+      </p:sp>
+      <p:sp>
+        <p:nvSpPr>
+          <p:cNvPr id="19" name="Shape 17"/>
+          <p:cNvSpPr/>
+          <p:nvPr/>
+        </p:nvSpPr>
+        <p:spPr>
+          <a:xfrm>
+            <a:off x="7930464" y="91440"/>
+            <a:ext cx="27432" cy="274320"/>
+          </a:xfrm>
+          <a:prstGeom prst="rect">
+            <a:avLst/>
+          </a:prstGeom>
+          <a:solidFill>
+            <a:srgbClr val="B45309"/>
+          </a:solidFill>
+          <a:ln w="12700">
+            <a:solidFill>
+              <a:srgbClr val="B45309"/>
+            </a:solidFill>
+            <a:prstDash val="solid"/>
+          </a:ln>
+        </p:spPr>
+      </p:sp>
+      <p:pic>
+        <p:nvPicPr>
+          <p:cNvPr id="20" name="Image 0" descr="preencoded.png">    </p:cNvPr>
+          <p:cNvPicPr>
+            <a:picLocks noChangeAspect="1"/>
+          </p:cNvPicPr>
+          <p:nvPr/>
+        </p:nvPicPr>
+        <p:blipFill>
+          <a:blip r:embed="rId1"/>
+          <a:stretch>
+            <a:fillRect/>
+          </a:stretch>
+        </p:blipFill>
+        <p:spPr>
+          <a:xfrm>
+            <a:off x="8003616" y="128016"/>
+            <a:ext cx="201168" cy="201168"/>
+          </a:xfrm>
+          <a:prstGeom prst="rect">
+            <a:avLst/>
+          </a:prstGeom>
+        </p:spPr>
+      </p:pic>
+      <p:sp>
+        <p:nvSpPr>
+          <p:cNvPr id="21" name="Text 18"/>
+          <p:cNvSpPr txBox="1"/>
+          <p:nvPr/>
+        </p:nvSpPr>
+        <p:spPr>
+          <a:xfrm>
+            <a:off x="8259648" y="91440"/>
+            <a:ext cx="3346831" cy="274320"/>
+          </a:xfrm>
+          <a:prstGeom prst="rect">
+            <a:avLst/>
+          </a:prstGeom>
+          <a:noFill/>
+          <a:ln/>
+        </p:spPr>
+        <p:txBody>
+          <a:bodyPr wrap="square" lIns="0" tIns="0" rIns="0" bIns="0" rtlCol="0" anchor="ctr"/>
+          <a:lstStyle/>
+          <a:p>
+            <a:pPr indent="0" marL="0">
+              <a:buNone/>
+            </a:pPr>
+            <a:r>
+              <a:rPr lang="en-US" sz="1100" b="1" dirty="0">
+                <a:solidFill>
+                  <a:srgbClr val="92400E"/>
+                </a:solidFill>
+                <a:latin typeface="Calibri" pitchFamily="34" charset="0"/>
+                <a:ea typeface="Calibri" pitchFamily="34" charset="-122"/>
+                <a:cs typeface="Calibri" pitchFamily="34" charset="-120"/>
+              </a:rPr>
+              <a:t>DA UTILIZZARE OGGI</a:t>
+            </a:r>
+            <a:pPr indent="0" marL="0">
+              <a:buNone/>
+            </a:pPr>
+            <a:r>
+              <a:rPr lang="en-US" sz="1100" dirty="0">
+                <a:solidFill>
+                  <a:srgbClr val="92400E"/>
+                </a:solidFill>
+                <a:latin typeface="Calibri" pitchFamily="34" charset="0"/>
+                <a:ea typeface="Calibri" pitchFamily="34" charset="-122"/>
+                <a:cs typeface="Calibri" pitchFamily="34" charset="-120"/>
+              </a:rPr>
+              <a:t> · gli strumenti di PRG32</a:t>
+            </a:r>
+            <a:endParaRPr lang="en-US" sz="1100" dirty="0"/>
+          </a:p>
+        </p:txBody>
+      </p:sp>
+      <p:sp>
+        <p:nvSpPr>
           <p:cNvPr id="25" name="Slide Number Placeholder 0"/>
           <p:cNvSpPr>
             <a:spLocks noGrp="1"/>
@@ -8799,6 +10119,158 @@
       </p:sp>
       <p:sp>
         <p:nvSpPr>
+          <p:cNvPr id="17" name="Shape 15"/>
+          <p:cNvSpPr/>
+          <p:nvPr/>
+        </p:nvSpPr>
+        <p:spPr>
+          <a:xfrm>
+            <a:off x="7875600" y="91440"/>
+            <a:ext cx="3767455" cy="274320"/>
+          </a:xfrm>
+          <a:prstGeom prst="rect">
+            <a:avLst/>
+          </a:prstGeom>
+          <a:solidFill>
+            <a:srgbClr val="FEF3C7"/>
+          </a:solidFill>
+          <a:ln w="12700">
+            <a:solidFill>
+              <a:srgbClr val="B45309"/>
+            </a:solidFill>
+            <a:prstDash val="solid"/>
+          </a:ln>
+        </p:spPr>
+      </p:sp>
+      <p:sp>
+        <p:nvSpPr>
+          <p:cNvPr id="18" name="Shape 16"/>
+          <p:cNvSpPr/>
+          <p:nvPr/>
+        </p:nvSpPr>
+        <p:spPr>
+          <a:xfrm>
+            <a:off x="7875600" y="91440"/>
+            <a:ext cx="27432" cy="274320"/>
+          </a:xfrm>
+          <a:prstGeom prst="rect">
+            <a:avLst/>
+          </a:prstGeom>
+          <a:solidFill>
+            <a:srgbClr val="B45309"/>
+          </a:solidFill>
+          <a:ln w="12700">
+            <a:solidFill>
+              <a:srgbClr val="B45309"/>
+            </a:solidFill>
+            <a:prstDash val="solid"/>
+          </a:ln>
+        </p:spPr>
+      </p:sp>
+      <p:sp>
+        <p:nvSpPr>
+          <p:cNvPr id="19" name="Shape 17"/>
+          <p:cNvSpPr/>
+          <p:nvPr/>
+        </p:nvSpPr>
+        <p:spPr>
+          <a:xfrm>
+            <a:off x="7930464" y="91440"/>
+            <a:ext cx="27432" cy="274320"/>
+          </a:xfrm>
+          <a:prstGeom prst="rect">
+            <a:avLst/>
+          </a:prstGeom>
+          <a:solidFill>
+            <a:srgbClr val="B45309"/>
+          </a:solidFill>
+          <a:ln w="12700">
+            <a:solidFill>
+              <a:srgbClr val="B45309"/>
+            </a:solidFill>
+            <a:prstDash val="solid"/>
+          </a:ln>
+        </p:spPr>
+      </p:sp>
+      <p:pic>
+        <p:nvPicPr>
+          <p:cNvPr id="20" name="Image 0" descr="preencoded.png">    </p:cNvPr>
+          <p:cNvPicPr>
+            <a:picLocks noChangeAspect="1"/>
+          </p:cNvPicPr>
+          <p:nvPr/>
+        </p:nvPicPr>
+        <p:blipFill>
+          <a:blip r:embed="rId1"/>
+          <a:stretch>
+            <a:fillRect/>
+          </a:stretch>
+        </p:blipFill>
+        <p:spPr>
+          <a:xfrm>
+            <a:off x="8003616" y="128016"/>
+            <a:ext cx="201168" cy="201168"/>
+          </a:xfrm>
+          <a:prstGeom prst="rect">
+            <a:avLst/>
+          </a:prstGeom>
+        </p:spPr>
+      </p:pic>
+      <p:sp>
+        <p:nvSpPr>
+          <p:cNvPr id="21" name="Text 18"/>
+          <p:cNvSpPr txBox="1"/>
+          <p:nvPr/>
+        </p:nvSpPr>
+        <p:spPr>
+          <a:xfrm>
+            <a:off x="8259648" y="91440"/>
+            <a:ext cx="3346831" cy="274320"/>
+          </a:xfrm>
+          <a:prstGeom prst="rect">
+            <a:avLst/>
+          </a:prstGeom>
+          <a:noFill/>
+          <a:ln/>
+        </p:spPr>
+        <p:txBody>
+          <a:bodyPr wrap="square" lIns="0" tIns="0" rIns="0" bIns="0" rtlCol="0" anchor="ctr"/>
+          <a:lstStyle/>
+          <a:p>
+            <a:pPr indent="0" marL="0">
+              <a:buNone/>
+            </a:pPr>
+            <a:r>
+              <a:rPr lang="en-US" sz="1100" b="1" dirty="0">
+                <a:solidFill>
+                  <a:srgbClr val="92400E"/>
+                </a:solidFill>
+                <a:latin typeface="Calibri" pitchFamily="34" charset="0"/>
+                <a:ea typeface="Calibri" pitchFamily="34" charset="-122"/>
+                <a:cs typeface="Calibri" pitchFamily="34" charset="-120"/>
+              </a:rPr>
+              <a:t>DA UTILIZZARE OGGI</a:t>
+            </a:r>
+            <a:pPr indent="0" marL="0">
+              <a:buNone/>
+            </a:pPr>
+            <a:r>
+              <a:rPr lang="en-US" sz="1100" dirty="0">
+                <a:solidFill>
+                  <a:srgbClr val="92400E"/>
+                </a:solidFill>
+                <a:latin typeface="Calibri" pitchFamily="34" charset="0"/>
+                <a:ea typeface="Calibri" pitchFamily="34" charset="-122"/>
+                <a:cs typeface="Calibri" pitchFamily="34" charset="-120"/>
+              </a:rPr>
+              <a:t> · gli strumenti di PRG32</a:t>
+            </a:r>
+            <a:endParaRPr lang="en-US" sz="1100" dirty="0"/>
+          </a:p>
+        </p:txBody>
+      </p:sp>
+      <p:sp>
+        <p:nvSpPr>
           <p:cNvPr id="25" name="Slide Number Placeholder 0"/>
           <p:cNvSpPr>
             <a:spLocks noGrp="1"/>
@@ -9635,6 +11107,158 @@
       </p:sp>
       <p:sp>
         <p:nvSpPr>
+          <p:cNvPr id="17" name="Shape 15"/>
+          <p:cNvSpPr/>
+          <p:nvPr/>
+        </p:nvSpPr>
+        <p:spPr>
+          <a:xfrm>
+            <a:off x="7875600" y="91440"/>
+            <a:ext cx="3767455" cy="274320"/>
+          </a:xfrm>
+          <a:prstGeom prst="rect">
+            <a:avLst/>
+          </a:prstGeom>
+          <a:solidFill>
+            <a:srgbClr val="FEF3C7"/>
+          </a:solidFill>
+          <a:ln w="12700">
+            <a:solidFill>
+              <a:srgbClr val="B45309"/>
+            </a:solidFill>
+            <a:prstDash val="solid"/>
+          </a:ln>
+        </p:spPr>
+      </p:sp>
+      <p:sp>
+        <p:nvSpPr>
+          <p:cNvPr id="18" name="Shape 16"/>
+          <p:cNvSpPr/>
+          <p:nvPr/>
+        </p:nvSpPr>
+        <p:spPr>
+          <a:xfrm>
+            <a:off x="7875600" y="91440"/>
+            <a:ext cx="27432" cy="274320"/>
+          </a:xfrm>
+          <a:prstGeom prst="rect">
+            <a:avLst/>
+          </a:prstGeom>
+          <a:solidFill>
+            <a:srgbClr val="B45309"/>
+          </a:solidFill>
+          <a:ln w="12700">
+            <a:solidFill>
+              <a:srgbClr val="B45309"/>
+            </a:solidFill>
+            <a:prstDash val="solid"/>
+          </a:ln>
+        </p:spPr>
+      </p:sp>
+      <p:sp>
+        <p:nvSpPr>
+          <p:cNvPr id="19" name="Shape 17"/>
+          <p:cNvSpPr/>
+          <p:nvPr/>
+        </p:nvSpPr>
+        <p:spPr>
+          <a:xfrm>
+            <a:off x="7930464" y="91440"/>
+            <a:ext cx="27432" cy="274320"/>
+          </a:xfrm>
+          <a:prstGeom prst="rect">
+            <a:avLst/>
+          </a:prstGeom>
+          <a:solidFill>
+            <a:srgbClr val="B45309"/>
+          </a:solidFill>
+          <a:ln w="12700">
+            <a:solidFill>
+              <a:srgbClr val="B45309"/>
+            </a:solidFill>
+            <a:prstDash val="solid"/>
+          </a:ln>
+        </p:spPr>
+      </p:sp>
+      <p:pic>
+        <p:nvPicPr>
+          <p:cNvPr id="20" name="Image 0" descr="preencoded.png">    </p:cNvPr>
+          <p:cNvPicPr>
+            <a:picLocks noChangeAspect="1"/>
+          </p:cNvPicPr>
+          <p:nvPr/>
+        </p:nvPicPr>
+        <p:blipFill>
+          <a:blip r:embed="rId1"/>
+          <a:stretch>
+            <a:fillRect/>
+          </a:stretch>
+        </p:blipFill>
+        <p:spPr>
+          <a:xfrm>
+            <a:off x="8003616" y="128016"/>
+            <a:ext cx="201168" cy="201168"/>
+          </a:xfrm>
+          <a:prstGeom prst="rect">
+            <a:avLst/>
+          </a:prstGeom>
+        </p:spPr>
+      </p:pic>
+      <p:sp>
+        <p:nvSpPr>
+          <p:cNvPr id="21" name="Text 18"/>
+          <p:cNvSpPr txBox="1"/>
+          <p:nvPr/>
+        </p:nvSpPr>
+        <p:spPr>
+          <a:xfrm>
+            <a:off x="8259648" y="91440"/>
+            <a:ext cx="3346831" cy="274320"/>
+          </a:xfrm>
+          <a:prstGeom prst="rect">
+            <a:avLst/>
+          </a:prstGeom>
+          <a:noFill/>
+          <a:ln/>
+        </p:spPr>
+        <p:txBody>
+          <a:bodyPr wrap="square" lIns="0" tIns="0" rIns="0" bIns="0" rtlCol="0" anchor="ctr"/>
+          <a:lstStyle/>
+          <a:p>
+            <a:pPr indent="0" marL="0">
+              <a:buNone/>
+            </a:pPr>
+            <a:r>
+              <a:rPr lang="en-US" sz="1100" b="1" dirty="0">
+                <a:solidFill>
+                  <a:srgbClr val="92400E"/>
+                </a:solidFill>
+                <a:latin typeface="Calibri" pitchFamily="34" charset="0"/>
+                <a:ea typeface="Calibri" pitchFamily="34" charset="-122"/>
+                <a:cs typeface="Calibri" pitchFamily="34" charset="-120"/>
+              </a:rPr>
+              <a:t>DA UTILIZZARE OGGI</a:t>
+            </a:r>
+            <a:pPr indent="0" marL="0">
+              <a:buNone/>
+            </a:pPr>
+            <a:r>
+              <a:rPr lang="en-US" sz="1100" dirty="0">
+                <a:solidFill>
+                  <a:srgbClr val="92400E"/>
+                </a:solidFill>
+                <a:latin typeface="Calibri" pitchFamily="34" charset="0"/>
+                <a:ea typeface="Calibri" pitchFamily="34" charset="-122"/>
+                <a:cs typeface="Calibri" pitchFamily="34" charset="-120"/>
+              </a:rPr>
+              <a:t> · gli strumenti di PRG32</a:t>
+            </a:r>
+            <a:endParaRPr lang="en-US" sz="1100" dirty="0"/>
+          </a:p>
+        </p:txBody>
+      </p:sp>
+      <p:sp>
+        <p:nvSpPr>
           <p:cNvPr id="25" name="Slide Number Placeholder 0"/>
           <p:cNvSpPr>
             <a:spLocks noGrp="1"/>
@@ -10413,6 +12037,158 @@
                 <a:cs typeface="Calibri" pitchFamily="34" charset="-120"/>
               </a:rPr>
               <a:t>Qui serve il QEMU originale (upstream), non la versione di Espressif</a:t>
+            </a:r>
+            <a:endParaRPr lang="en-US" sz="1100" dirty="0"/>
+          </a:p>
+        </p:txBody>
+      </p:sp>
+      <p:sp>
+        <p:nvSpPr>
+          <p:cNvPr id="17" name="Shape 15"/>
+          <p:cNvSpPr/>
+          <p:nvPr/>
+        </p:nvSpPr>
+        <p:spPr>
+          <a:xfrm>
+            <a:off x="7875600" y="91440"/>
+            <a:ext cx="3767455" cy="274320"/>
+          </a:xfrm>
+          <a:prstGeom prst="rect">
+            <a:avLst/>
+          </a:prstGeom>
+          <a:solidFill>
+            <a:srgbClr val="FEF3C7"/>
+          </a:solidFill>
+          <a:ln w="12700">
+            <a:solidFill>
+              <a:srgbClr val="B45309"/>
+            </a:solidFill>
+            <a:prstDash val="solid"/>
+          </a:ln>
+        </p:spPr>
+      </p:sp>
+      <p:sp>
+        <p:nvSpPr>
+          <p:cNvPr id="18" name="Shape 16"/>
+          <p:cNvSpPr/>
+          <p:nvPr/>
+        </p:nvSpPr>
+        <p:spPr>
+          <a:xfrm>
+            <a:off x="7875600" y="91440"/>
+            <a:ext cx="27432" cy="274320"/>
+          </a:xfrm>
+          <a:prstGeom prst="rect">
+            <a:avLst/>
+          </a:prstGeom>
+          <a:solidFill>
+            <a:srgbClr val="B45309"/>
+          </a:solidFill>
+          <a:ln w="12700">
+            <a:solidFill>
+              <a:srgbClr val="B45309"/>
+            </a:solidFill>
+            <a:prstDash val="solid"/>
+          </a:ln>
+        </p:spPr>
+      </p:sp>
+      <p:sp>
+        <p:nvSpPr>
+          <p:cNvPr id="19" name="Shape 17"/>
+          <p:cNvSpPr/>
+          <p:nvPr/>
+        </p:nvSpPr>
+        <p:spPr>
+          <a:xfrm>
+            <a:off x="7930464" y="91440"/>
+            <a:ext cx="27432" cy="274320"/>
+          </a:xfrm>
+          <a:prstGeom prst="rect">
+            <a:avLst/>
+          </a:prstGeom>
+          <a:solidFill>
+            <a:srgbClr val="B45309"/>
+          </a:solidFill>
+          <a:ln w="12700">
+            <a:solidFill>
+              <a:srgbClr val="B45309"/>
+            </a:solidFill>
+            <a:prstDash val="solid"/>
+          </a:ln>
+        </p:spPr>
+      </p:sp>
+      <p:pic>
+        <p:nvPicPr>
+          <p:cNvPr id="20" name="Image 0" descr="preencoded.png">    </p:cNvPr>
+          <p:cNvPicPr>
+            <a:picLocks noChangeAspect="1"/>
+          </p:cNvPicPr>
+          <p:nvPr/>
+        </p:nvPicPr>
+        <p:blipFill>
+          <a:blip r:embed="rId1"/>
+          <a:stretch>
+            <a:fillRect/>
+          </a:stretch>
+        </p:blipFill>
+        <p:spPr>
+          <a:xfrm>
+            <a:off x="8003616" y="128016"/>
+            <a:ext cx="201168" cy="201168"/>
+          </a:xfrm>
+          <a:prstGeom prst="rect">
+            <a:avLst/>
+          </a:prstGeom>
+        </p:spPr>
+      </p:pic>
+      <p:sp>
+        <p:nvSpPr>
+          <p:cNvPr id="21" name="Text 18"/>
+          <p:cNvSpPr txBox="1"/>
+          <p:nvPr/>
+        </p:nvSpPr>
+        <p:spPr>
+          <a:xfrm>
+            <a:off x="8259648" y="91440"/>
+            <a:ext cx="3346831" cy="274320"/>
+          </a:xfrm>
+          <a:prstGeom prst="rect">
+            <a:avLst/>
+          </a:prstGeom>
+          <a:noFill/>
+          <a:ln/>
+        </p:spPr>
+        <p:txBody>
+          <a:bodyPr wrap="square" lIns="0" tIns="0" rIns="0" bIns="0" rtlCol="0" anchor="ctr"/>
+          <a:lstStyle/>
+          <a:p>
+            <a:pPr indent="0" marL="0">
+              <a:buNone/>
+            </a:pPr>
+            <a:r>
+              <a:rPr lang="en-US" sz="1100" b="1" dirty="0">
+                <a:solidFill>
+                  <a:srgbClr val="92400E"/>
+                </a:solidFill>
+                <a:latin typeface="Calibri" pitchFamily="34" charset="0"/>
+                <a:ea typeface="Calibri" pitchFamily="34" charset="-122"/>
+                <a:cs typeface="Calibri" pitchFamily="34" charset="-120"/>
+              </a:rPr>
+              <a:t>DA UTILIZZARE OGGI</a:t>
+            </a:r>
+            <a:pPr indent="0" marL="0">
+              <a:buNone/>
+            </a:pPr>
+            <a:r>
+              <a:rPr lang="en-US" sz="1100" dirty="0">
+                <a:solidFill>
+                  <a:srgbClr val="92400E"/>
+                </a:solidFill>
+                <a:latin typeface="Calibri" pitchFamily="34" charset="0"/>
+                <a:ea typeface="Calibri" pitchFamily="34" charset="-122"/>
+                <a:cs typeface="Calibri" pitchFamily="34" charset="-120"/>
+              </a:rPr>
+              <a:t> · gli strumenti di PRG32</a:t>
             </a:r>
             <a:endParaRPr lang="en-US" sz="1100" dirty="0"/>
           </a:p>
@@ -12360,6 +14136,158 @@
       </p:graphicFrame>
       <p:sp>
         <p:nvSpPr>
+          <p:cNvPr id="4" name="Shape 1"/>
+          <p:cNvSpPr/>
+          <p:nvPr/>
+        </p:nvSpPr>
+        <p:spPr>
+          <a:xfrm>
+            <a:off x="7875600" y="91440"/>
+            <a:ext cx="3767455" cy="274320"/>
+          </a:xfrm>
+          <a:prstGeom prst="rect">
+            <a:avLst/>
+          </a:prstGeom>
+          <a:solidFill>
+            <a:srgbClr val="FEF3C7"/>
+          </a:solidFill>
+          <a:ln w="12700">
+            <a:solidFill>
+              <a:srgbClr val="B45309"/>
+            </a:solidFill>
+            <a:prstDash val="solid"/>
+          </a:ln>
+        </p:spPr>
+      </p:sp>
+      <p:sp>
+        <p:nvSpPr>
+          <p:cNvPr id="5" name="Shape 2"/>
+          <p:cNvSpPr/>
+          <p:nvPr/>
+        </p:nvSpPr>
+        <p:spPr>
+          <a:xfrm>
+            <a:off x="7875600" y="91440"/>
+            <a:ext cx="27432" cy="274320"/>
+          </a:xfrm>
+          <a:prstGeom prst="rect">
+            <a:avLst/>
+          </a:prstGeom>
+          <a:solidFill>
+            <a:srgbClr val="B45309"/>
+          </a:solidFill>
+          <a:ln w="12700">
+            <a:solidFill>
+              <a:srgbClr val="B45309"/>
+            </a:solidFill>
+            <a:prstDash val="solid"/>
+          </a:ln>
+        </p:spPr>
+      </p:sp>
+      <p:sp>
+        <p:nvSpPr>
+          <p:cNvPr id="6" name="Shape 3"/>
+          <p:cNvSpPr/>
+          <p:nvPr/>
+        </p:nvSpPr>
+        <p:spPr>
+          <a:xfrm>
+            <a:off x="7930464" y="91440"/>
+            <a:ext cx="27432" cy="274320"/>
+          </a:xfrm>
+          <a:prstGeom prst="rect">
+            <a:avLst/>
+          </a:prstGeom>
+          <a:solidFill>
+            <a:srgbClr val="B45309"/>
+          </a:solidFill>
+          <a:ln w="12700">
+            <a:solidFill>
+              <a:srgbClr val="B45309"/>
+            </a:solidFill>
+            <a:prstDash val="solid"/>
+          </a:ln>
+        </p:spPr>
+      </p:sp>
+      <p:pic>
+        <p:nvPicPr>
+          <p:cNvPr id="7" name="Image 0" descr="preencoded.png">    </p:cNvPr>
+          <p:cNvPicPr>
+            <a:picLocks noChangeAspect="1"/>
+          </p:cNvPicPr>
+          <p:nvPr/>
+        </p:nvPicPr>
+        <p:blipFill>
+          <a:blip r:embed="rId1"/>
+          <a:stretch>
+            <a:fillRect/>
+          </a:stretch>
+        </p:blipFill>
+        <p:spPr>
+          <a:xfrm>
+            <a:off x="8003616" y="128016"/>
+            <a:ext cx="201168" cy="201168"/>
+          </a:xfrm>
+          <a:prstGeom prst="rect">
+            <a:avLst/>
+          </a:prstGeom>
+        </p:spPr>
+      </p:pic>
+      <p:sp>
+        <p:nvSpPr>
+          <p:cNvPr id="8" name="Text 4"/>
+          <p:cNvSpPr txBox="1"/>
+          <p:nvPr/>
+        </p:nvSpPr>
+        <p:spPr>
+          <a:xfrm>
+            <a:off x="8259648" y="91440"/>
+            <a:ext cx="3346831" cy="274320"/>
+          </a:xfrm>
+          <a:prstGeom prst="rect">
+            <a:avLst/>
+          </a:prstGeom>
+          <a:noFill/>
+          <a:ln/>
+        </p:spPr>
+        <p:txBody>
+          <a:bodyPr wrap="square" lIns="0" tIns="0" rIns="0" bIns="0" rtlCol="0" anchor="ctr"/>
+          <a:lstStyle/>
+          <a:p>
+            <a:pPr indent="0" marL="0">
+              <a:buNone/>
+            </a:pPr>
+            <a:r>
+              <a:rPr lang="en-US" sz="1100" b="1" dirty="0">
+                <a:solidFill>
+                  <a:srgbClr val="92400E"/>
+                </a:solidFill>
+                <a:latin typeface="Calibri" pitchFamily="34" charset="0"/>
+                <a:ea typeface="Calibri" pitchFamily="34" charset="-122"/>
+                <a:cs typeface="Calibri" pitchFamily="34" charset="-120"/>
+              </a:rPr>
+              <a:t>DA UTILIZZARE OGGI</a:t>
+            </a:r>
+            <a:pPr indent="0" marL="0">
+              <a:buNone/>
+            </a:pPr>
+            <a:r>
+              <a:rPr lang="en-US" sz="1100" dirty="0">
+                <a:solidFill>
+                  <a:srgbClr val="92400E"/>
+                </a:solidFill>
+                <a:latin typeface="Calibri" pitchFamily="34" charset="0"/>
+                <a:ea typeface="Calibri" pitchFamily="34" charset="-122"/>
+                <a:cs typeface="Calibri" pitchFamily="34" charset="-120"/>
+              </a:rPr>
+              <a:t> · gli strumenti di PRG32</a:t>
+            </a:r>
+            <a:endParaRPr lang="en-US" sz="1100" dirty="0"/>
+          </a:p>
+        </p:txBody>
+      </p:sp>
+      <p:sp>
+        <p:nvSpPr>
           <p:cNvPr id="25" name="Slide Number Placeholder 0"/>
           <p:cNvSpPr>
             <a:spLocks noGrp="1"/>
@@ -13802,6 +15730,133 @@
       </p:sp>
       <p:sp>
         <p:nvSpPr>
+          <p:cNvPr id="17" name="Shape 15"/>
+          <p:cNvSpPr/>
+          <p:nvPr/>
+        </p:nvSpPr>
+        <p:spPr>
+          <a:xfrm>
+            <a:off x="7329373" y="91440"/>
+            <a:ext cx="4313682" cy="274320"/>
+          </a:xfrm>
+          <a:prstGeom prst="rect">
+            <a:avLst/>
+          </a:prstGeom>
+          <a:solidFill>
+            <a:srgbClr val="E0F2FE"/>
+          </a:solidFill>
+          <a:ln w="12700">
+            <a:solidFill>
+              <a:srgbClr val="0369A1"/>
+            </a:solidFill>
+            <a:prstDash val="solid"/>
+          </a:ln>
+        </p:spPr>
+      </p:sp>
+      <p:sp>
+        <p:nvSpPr>
+          <p:cNvPr id="18" name="Shape 16"/>
+          <p:cNvSpPr/>
+          <p:nvPr/>
+        </p:nvSpPr>
+        <p:spPr>
+          <a:xfrm>
+            <a:off x="7329373" y="91440"/>
+            <a:ext cx="73152" cy="274320"/>
+          </a:xfrm>
+          <a:prstGeom prst="rect">
+            <a:avLst/>
+          </a:prstGeom>
+          <a:solidFill>
+            <a:srgbClr val="0369A1"/>
+          </a:solidFill>
+          <a:ln w="12700">
+            <a:solidFill>
+              <a:srgbClr val="0369A1"/>
+            </a:solidFill>
+            <a:prstDash val="solid"/>
+          </a:ln>
+        </p:spPr>
+      </p:sp>
+      <p:pic>
+        <p:nvPicPr>
+          <p:cNvPr id="19" name="Image 0" descr="preencoded.png">    </p:cNvPr>
+          <p:cNvPicPr>
+            <a:picLocks noChangeAspect="1"/>
+          </p:cNvPicPr>
+          <p:nvPr/>
+        </p:nvPicPr>
+        <p:blipFill>
+          <a:blip r:embed="rId1"/>
+          <a:stretch>
+            <a:fillRect/>
+          </a:stretch>
+        </p:blipFill>
+        <p:spPr>
+          <a:xfrm>
+            <a:off x="7457389" y="128016"/>
+            <a:ext cx="201168" cy="201168"/>
+          </a:xfrm>
+          <a:prstGeom prst="rect">
+            <a:avLst/>
+          </a:prstGeom>
+        </p:spPr>
+      </p:pic>
+      <p:sp>
+        <p:nvSpPr>
+          <p:cNvPr id="20" name="Text 17"/>
+          <p:cNvSpPr txBox="1"/>
+          <p:nvPr/>
+        </p:nvSpPr>
+        <p:spPr>
+          <a:xfrm>
+            <a:off x="7713421" y="91440"/>
+            <a:ext cx="3893058" cy="274320"/>
+          </a:xfrm>
+          <a:prstGeom prst="rect">
+            <a:avLst/>
+          </a:prstGeom>
+          <a:noFill/>
+          <a:ln/>
+        </p:spPr>
+        <p:txBody>
+          <a:bodyPr wrap="square" lIns="0" tIns="0" rIns="0" bIns="0" rtlCol="0" anchor="ctr"/>
+          <a:lstStyle/>
+          <a:p>
+            <a:pPr indent="0" marL="0">
+              <a:buNone/>
+            </a:pPr>
+            <a:r>
+              <a:rPr lang="en-US" sz="1100" b="1" dirty="0">
+                <a:solidFill>
+                  <a:srgbClr val="075985"/>
+                </a:solidFill>
+                <a:latin typeface="Calibri" pitchFamily="34" charset="0"/>
+                <a:ea typeface="Calibri" pitchFamily="34" charset="-122"/>
+                <a:cs typeface="Calibri" pitchFamily="34" charset="-120"/>
+              </a:rPr>
+              <a:t>DA COMPRENDERE OGGI</a:t>
+            </a:r>
+            <a:pPr indent="0" marL="0">
+              <a:buNone/>
+            </a:pPr>
+            <a:r>
+              <a:rPr lang="en-US" sz="1100" dirty="0">
+                <a:solidFill>
+                  <a:srgbClr val="075985"/>
+                </a:solidFill>
+                <a:latin typeface="Calibri" pitchFamily="34" charset="0"/>
+                <a:ea typeface="Calibri" pitchFamily="34" charset="-122"/>
+                <a:cs typeface="Calibri" pitchFamily="34" charset="-120"/>
+              </a:rPr>
+              <a:t> · l'equazione delle prestazioni</a:t>
+            </a:r>
+            <a:endParaRPr lang="en-US" sz="1100" dirty="0"/>
+          </a:p>
+        </p:txBody>
+      </p:sp>
+      <p:sp>
+        <p:nvSpPr>
           <p:cNvPr id="25" name="Slide Number Placeholder 0"/>
           <p:cNvSpPr>
             <a:spLocks noGrp="1"/>
@@ -14589,6 +16644,133 @@
       </p:sp>
       <p:sp>
         <p:nvSpPr>
+          <p:cNvPr id="17" name="Shape 15"/>
+          <p:cNvSpPr/>
+          <p:nvPr/>
+        </p:nvSpPr>
+        <p:spPr>
+          <a:xfrm>
+            <a:off x="7592009" y="91440"/>
+            <a:ext cx="4051046" cy="274320"/>
+          </a:xfrm>
+          <a:prstGeom prst="rect">
+            <a:avLst/>
+          </a:prstGeom>
+          <a:solidFill>
+            <a:srgbClr val="E0F2FE"/>
+          </a:solidFill>
+          <a:ln w="12700">
+            <a:solidFill>
+              <a:srgbClr val="0369A1"/>
+            </a:solidFill>
+            <a:prstDash val="solid"/>
+          </a:ln>
+        </p:spPr>
+      </p:sp>
+      <p:sp>
+        <p:nvSpPr>
+          <p:cNvPr id="18" name="Shape 16"/>
+          <p:cNvSpPr/>
+          <p:nvPr/>
+        </p:nvSpPr>
+        <p:spPr>
+          <a:xfrm>
+            <a:off x="7592009" y="91440"/>
+            <a:ext cx="73152" cy="274320"/>
+          </a:xfrm>
+          <a:prstGeom prst="rect">
+            <a:avLst/>
+          </a:prstGeom>
+          <a:solidFill>
+            <a:srgbClr val="0369A1"/>
+          </a:solidFill>
+          <a:ln w="12700">
+            <a:solidFill>
+              <a:srgbClr val="0369A1"/>
+            </a:solidFill>
+            <a:prstDash val="solid"/>
+          </a:ln>
+        </p:spPr>
+      </p:sp>
+      <p:pic>
+        <p:nvPicPr>
+          <p:cNvPr id="19" name="Image 0" descr="preencoded.png">    </p:cNvPr>
+          <p:cNvPicPr>
+            <a:picLocks noChangeAspect="1"/>
+          </p:cNvPicPr>
+          <p:nvPr/>
+        </p:nvPicPr>
+        <p:blipFill>
+          <a:blip r:embed="rId1"/>
+          <a:stretch>
+            <a:fillRect/>
+          </a:stretch>
+        </p:blipFill>
+        <p:spPr>
+          <a:xfrm>
+            <a:off x="7720025" y="128016"/>
+            <a:ext cx="201168" cy="201168"/>
+          </a:xfrm>
+          <a:prstGeom prst="rect">
+            <a:avLst/>
+          </a:prstGeom>
+        </p:spPr>
+      </p:pic>
+      <p:sp>
+        <p:nvSpPr>
+          <p:cNvPr id="20" name="Text 17"/>
+          <p:cNvSpPr txBox="1"/>
+          <p:nvPr/>
+        </p:nvSpPr>
+        <p:spPr>
+          <a:xfrm>
+            <a:off x="7976057" y="91440"/>
+            <a:ext cx="3630422" cy="274320"/>
+          </a:xfrm>
+          <a:prstGeom prst="rect">
+            <a:avLst/>
+          </a:prstGeom>
+          <a:noFill/>
+          <a:ln/>
+        </p:spPr>
+        <p:txBody>
+          <a:bodyPr wrap="square" lIns="0" tIns="0" rIns="0" bIns="0" rtlCol="0" anchor="ctr"/>
+          <a:lstStyle/>
+          <a:p>
+            <a:pPr indent="0" marL="0">
+              <a:buNone/>
+            </a:pPr>
+            <a:r>
+              <a:rPr lang="en-US" sz="1100" b="1" dirty="0">
+                <a:solidFill>
+                  <a:srgbClr val="075985"/>
+                </a:solidFill>
+                <a:latin typeface="Calibri" pitchFamily="34" charset="0"/>
+                <a:ea typeface="Calibri" pitchFamily="34" charset="-122"/>
+                <a:cs typeface="Calibri" pitchFamily="34" charset="-120"/>
+              </a:rPr>
+              <a:t>DA COMPRENDERE OGGI</a:t>
+            </a:r>
+            <a:pPr indent="0" marL="0">
+              <a:buNone/>
+            </a:pPr>
+            <a:r>
+              <a:rPr lang="en-US" sz="1100" dirty="0">
+                <a:solidFill>
+                  <a:srgbClr val="075985"/>
+                </a:solidFill>
+                <a:latin typeface="Calibri" pitchFamily="34" charset="0"/>
+                <a:ea typeface="Calibri" pitchFamily="34" charset="-122"/>
+                <a:cs typeface="Calibri" pitchFamily="34" charset="-120"/>
+              </a:rPr>
+              <a:t> · i processori superscalari</a:t>
+            </a:r>
+            <a:endParaRPr lang="en-US" sz="1100" dirty="0"/>
+          </a:p>
+        </p:txBody>
+      </p:sp>
+      <p:sp>
+        <p:nvSpPr>
           <p:cNvPr id="25" name="Slide Number Placeholder 0"/>
           <p:cNvSpPr>
             <a:spLocks noGrp="1"/>
@@ -15337,6 +17519,133 @@
       </p:sp>
       <p:sp>
         <p:nvSpPr>
+          <p:cNvPr id="17" name="Shape 15"/>
+          <p:cNvSpPr/>
+          <p:nvPr/>
+        </p:nvSpPr>
+        <p:spPr>
+          <a:xfrm>
+            <a:off x="7592009" y="91440"/>
+            <a:ext cx="4051046" cy="274320"/>
+          </a:xfrm>
+          <a:prstGeom prst="rect">
+            <a:avLst/>
+          </a:prstGeom>
+          <a:solidFill>
+            <a:srgbClr val="E0F2FE"/>
+          </a:solidFill>
+          <a:ln w="12700">
+            <a:solidFill>
+              <a:srgbClr val="0369A1"/>
+            </a:solidFill>
+            <a:prstDash val="solid"/>
+          </a:ln>
+        </p:spPr>
+      </p:sp>
+      <p:sp>
+        <p:nvSpPr>
+          <p:cNvPr id="18" name="Shape 16"/>
+          <p:cNvSpPr/>
+          <p:nvPr/>
+        </p:nvSpPr>
+        <p:spPr>
+          <a:xfrm>
+            <a:off x="7592009" y="91440"/>
+            <a:ext cx="73152" cy="274320"/>
+          </a:xfrm>
+          <a:prstGeom prst="rect">
+            <a:avLst/>
+          </a:prstGeom>
+          <a:solidFill>
+            <a:srgbClr val="0369A1"/>
+          </a:solidFill>
+          <a:ln w="12700">
+            <a:solidFill>
+              <a:srgbClr val="0369A1"/>
+            </a:solidFill>
+            <a:prstDash val="solid"/>
+          </a:ln>
+        </p:spPr>
+      </p:sp>
+      <p:pic>
+        <p:nvPicPr>
+          <p:cNvPr id="19" name="Image 0" descr="preencoded.png">    </p:cNvPr>
+          <p:cNvPicPr>
+            <a:picLocks noChangeAspect="1"/>
+          </p:cNvPicPr>
+          <p:nvPr/>
+        </p:nvPicPr>
+        <p:blipFill>
+          <a:blip r:embed="rId1"/>
+          <a:stretch>
+            <a:fillRect/>
+          </a:stretch>
+        </p:blipFill>
+        <p:spPr>
+          <a:xfrm>
+            <a:off x="7720025" y="128016"/>
+            <a:ext cx="201168" cy="201168"/>
+          </a:xfrm>
+          <a:prstGeom prst="rect">
+            <a:avLst/>
+          </a:prstGeom>
+        </p:spPr>
+      </p:pic>
+      <p:sp>
+        <p:nvSpPr>
+          <p:cNvPr id="20" name="Text 17"/>
+          <p:cNvSpPr txBox="1"/>
+          <p:nvPr/>
+        </p:nvSpPr>
+        <p:spPr>
+          <a:xfrm>
+            <a:off x="7976057" y="91440"/>
+            <a:ext cx="3630422" cy="274320"/>
+          </a:xfrm>
+          <a:prstGeom prst="rect">
+            <a:avLst/>
+          </a:prstGeom>
+          <a:noFill/>
+          <a:ln/>
+        </p:spPr>
+        <p:txBody>
+          <a:bodyPr wrap="square" lIns="0" tIns="0" rIns="0" bIns="0" rtlCol="0" anchor="ctr"/>
+          <a:lstStyle/>
+          <a:p>
+            <a:pPr indent="0" marL="0">
+              <a:buNone/>
+            </a:pPr>
+            <a:r>
+              <a:rPr lang="en-US" sz="1100" b="1" dirty="0">
+                <a:solidFill>
+                  <a:srgbClr val="075985"/>
+                </a:solidFill>
+                <a:latin typeface="Calibri" pitchFamily="34" charset="0"/>
+                <a:ea typeface="Calibri" pitchFamily="34" charset="-122"/>
+                <a:cs typeface="Calibri" pitchFamily="34" charset="-120"/>
+              </a:rPr>
+              <a:t>DA COMPRENDERE OGGI</a:t>
+            </a:r>
+            <a:pPr indent="0" marL="0">
+              <a:buNone/>
+            </a:pPr>
+            <a:r>
+              <a:rPr lang="en-US" sz="1100" dirty="0">
+                <a:solidFill>
+                  <a:srgbClr val="075985"/>
+                </a:solidFill>
+                <a:latin typeface="Calibri" pitchFamily="34" charset="0"/>
+                <a:ea typeface="Calibri" pitchFamily="34" charset="-122"/>
+                <a:cs typeface="Calibri" pitchFamily="34" charset="-120"/>
+              </a:rPr>
+              <a:t> · i processori superscalari</a:t>
+            </a:r>
+            <a:endParaRPr lang="en-US" sz="1100" dirty="0"/>
+          </a:p>
+        </p:txBody>
+      </p:sp>
+      <p:sp>
+        <p:nvSpPr>
           <p:cNvPr id="25" name="Slide Number Placeholder 0"/>
           <p:cNvSpPr>
             <a:spLocks noGrp="1"/>
@@ -16161,6 +18470,133 @@
       </p:sp>
       <p:sp>
         <p:nvSpPr>
+          <p:cNvPr id="17" name="Shape 15"/>
+          <p:cNvSpPr/>
+          <p:nvPr/>
+        </p:nvSpPr>
+        <p:spPr>
+          <a:xfrm>
+            <a:off x="7657668" y="91440"/>
+            <a:ext cx="3985387" cy="274320"/>
+          </a:xfrm>
+          <a:prstGeom prst="rect">
+            <a:avLst/>
+          </a:prstGeom>
+          <a:solidFill>
+            <a:srgbClr val="E0F2FE"/>
+          </a:solidFill>
+          <a:ln w="12700">
+            <a:solidFill>
+              <a:srgbClr val="0369A1"/>
+            </a:solidFill>
+            <a:prstDash val="solid"/>
+          </a:ln>
+        </p:spPr>
+      </p:sp>
+      <p:sp>
+        <p:nvSpPr>
+          <p:cNvPr id="18" name="Shape 16"/>
+          <p:cNvSpPr/>
+          <p:nvPr/>
+        </p:nvSpPr>
+        <p:spPr>
+          <a:xfrm>
+            <a:off x="7657668" y="91440"/>
+            <a:ext cx="73152" cy="274320"/>
+          </a:xfrm>
+          <a:prstGeom prst="rect">
+            <a:avLst/>
+          </a:prstGeom>
+          <a:solidFill>
+            <a:srgbClr val="0369A1"/>
+          </a:solidFill>
+          <a:ln w="12700">
+            <a:solidFill>
+              <a:srgbClr val="0369A1"/>
+            </a:solidFill>
+            <a:prstDash val="solid"/>
+          </a:ln>
+        </p:spPr>
+      </p:sp>
+      <p:pic>
+        <p:nvPicPr>
+          <p:cNvPr id="19" name="Image 0" descr="preencoded.png">    </p:cNvPr>
+          <p:cNvPicPr>
+            <a:picLocks noChangeAspect="1"/>
+          </p:cNvPicPr>
+          <p:nvPr/>
+        </p:nvPicPr>
+        <p:blipFill>
+          <a:blip r:embed="rId1"/>
+          <a:stretch>
+            <a:fillRect/>
+          </a:stretch>
+        </p:blipFill>
+        <p:spPr>
+          <a:xfrm>
+            <a:off x="7785684" y="128016"/>
+            <a:ext cx="201168" cy="201168"/>
+          </a:xfrm>
+          <a:prstGeom prst="rect">
+            <a:avLst/>
+          </a:prstGeom>
+        </p:spPr>
+      </p:pic>
+      <p:sp>
+        <p:nvSpPr>
+          <p:cNvPr id="20" name="Text 17"/>
+          <p:cNvSpPr txBox="1"/>
+          <p:nvPr/>
+        </p:nvSpPr>
+        <p:spPr>
+          <a:xfrm>
+            <a:off x="8041716" y="91440"/>
+            <a:ext cx="3564763" cy="274320"/>
+          </a:xfrm>
+          <a:prstGeom prst="rect">
+            <a:avLst/>
+          </a:prstGeom>
+          <a:noFill/>
+          <a:ln/>
+        </p:spPr>
+        <p:txBody>
+          <a:bodyPr wrap="square" lIns="0" tIns="0" rIns="0" bIns="0" rtlCol="0" anchor="ctr"/>
+          <a:lstStyle/>
+          <a:p>
+            <a:pPr indent="0" marL="0">
+              <a:buNone/>
+            </a:pPr>
+            <a:r>
+              <a:rPr lang="en-US" sz="1100" b="1" dirty="0">
+                <a:solidFill>
+                  <a:srgbClr val="075985"/>
+                </a:solidFill>
+                <a:latin typeface="Calibri" pitchFamily="34" charset="0"/>
+                <a:ea typeface="Calibri" pitchFamily="34" charset="-122"/>
+                <a:cs typeface="Calibri" pitchFamily="34" charset="-120"/>
+              </a:rPr>
+              <a:t>DA COMPRENDERE OGGI</a:t>
+            </a:r>
+            <a:pPr indent="0" marL="0">
+              <a:buNone/>
+            </a:pPr>
+            <a:r>
+              <a:rPr lang="en-US" sz="1100" dirty="0">
+                <a:solidFill>
+                  <a:srgbClr val="075985"/>
+                </a:solidFill>
+                <a:latin typeface="Calibri" pitchFamily="34" charset="0"/>
+                <a:ea typeface="Calibri" pitchFamily="34" charset="-122"/>
+                <a:cs typeface="Calibri" pitchFamily="34" charset="-120"/>
+              </a:rPr>
+              <a:t> · le istruzioni vettoriali</a:t>
+            </a:r>
+            <a:endParaRPr lang="en-US" sz="1100" dirty="0"/>
+          </a:p>
+        </p:txBody>
+      </p:sp>
+      <p:sp>
+        <p:nvSpPr>
           <p:cNvPr id="25" name="Slide Number Placeholder 0"/>
           <p:cNvSpPr>
             <a:spLocks noGrp="1"/>
@@ -17101,6 +19537,133 @@
       </p:sp>
       <p:sp>
         <p:nvSpPr>
+          <p:cNvPr id="17" name="Shape 15"/>
+          <p:cNvSpPr/>
+          <p:nvPr/>
+        </p:nvSpPr>
+        <p:spPr>
+          <a:xfrm>
+            <a:off x="7657668" y="91440"/>
+            <a:ext cx="3985387" cy="274320"/>
+          </a:xfrm>
+          <a:prstGeom prst="rect">
+            <a:avLst/>
+          </a:prstGeom>
+          <a:solidFill>
+            <a:srgbClr val="E0F2FE"/>
+          </a:solidFill>
+          <a:ln w="12700">
+            <a:solidFill>
+              <a:srgbClr val="0369A1"/>
+            </a:solidFill>
+            <a:prstDash val="solid"/>
+          </a:ln>
+        </p:spPr>
+      </p:sp>
+      <p:sp>
+        <p:nvSpPr>
+          <p:cNvPr id="18" name="Shape 16"/>
+          <p:cNvSpPr/>
+          <p:nvPr/>
+        </p:nvSpPr>
+        <p:spPr>
+          <a:xfrm>
+            <a:off x="7657668" y="91440"/>
+            <a:ext cx="73152" cy="274320"/>
+          </a:xfrm>
+          <a:prstGeom prst="rect">
+            <a:avLst/>
+          </a:prstGeom>
+          <a:solidFill>
+            <a:srgbClr val="0369A1"/>
+          </a:solidFill>
+          <a:ln w="12700">
+            <a:solidFill>
+              <a:srgbClr val="0369A1"/>
+            </a:solidFill>
+            <a:prstDash val="solid"/>
+          </a:ln>
+        </p:spPr>
+      </p:sp>
+      <p:pic>
+        <p:nvPicPr>
+          <p:cNvPr id="19" name="Image 0" descr="preencoded.png">    </p:cNvPr>
+          <p:cNvPicPr>
+            <a:picLocks noChangeAspect="1"/>
+          </p:cNvPicPr>
+          <p:nvPr/>
+        </p:nvPicPr>
+        <p:blipFill>
+          <a:blip r:embed="rId1"/>
+          <a:stretch>
+            <a:fillRect/>
+          </a:stretch>
+        </p:blipFill>
+        <p:spPr>
+          <a:xfrm>
+            <a:off x="7785684" y="128016"/>
+            <a:ext cx="201168" cy="201168"/>
+          </a:xfrm>
+          <a:prstGeom prst="rect">
+            <a:avLst/>
+          </a:prstGeom>
+        </p:spPr>
+      </p:pic>
+      <p:sp>
+        <p:nvSpPr>
+          <p:cNvPr id="20" name="Text 17"/>
+          <p:cNvSpPr txBox="1"/>
+          <p:nvPr/>
+        </p:nvSpPr>
+        <p:spPr>
+          <a:xfrm>
+            <a:off x="8041716" y="91440"/>
+            <a:ext cx="3564763" cy="274320"/>
+          </a:xfrm>
+          <a:prstGeom prst="rect">
+            <a:avLst/>
+          </a:prstGeom>
+          <a:noFill/>
+          <a:ln/>
+        </p:spPr>
+        <p:txBody>
+          <a:bodyPr wrap="square" lIns="0" tIns="0" rIns="0" bIns="0" rtlCol="0" anchor="ctr"/>
+          <a:lstStyle/>
+          <a:p>
+            <a:pPr indent="0" marL="0">
+              <a:buNone/>
+            </a:pPr>
+            <a:r>
+              <a:rPr lang="en-US" sz="1100" b="1" dirty="0">
+                <a:solidFill>
+                  <a:srgbClr val="075985"/>
+                </a:solidFill>
+                <a:latin typeface="Calibri" pitchFamily="34" charset="0"/>
+                <a:ea typeface="Calibri" pitchFamily="34" charset="-122"/>
+                <a:cs typeface="Calibri" pitchFamily="34" charset="-120"/>
+              </a:rPr>
+              <a:t>DA COMPRENDERE OGGI</a:t>
+            </a:r>
+            <a:pPr indent="0" marL="0">
+              <a:buNone/>
+            </a:pPr>
+            <a:r>
+              <a:rPr lang="en-US" sz="1100" dirty="0">
+                <a:solidFill>
+                  <a:srgbClr val="075985"/>
+                </a:solidFill>
+                <a:latin typeface="Calibri" pitchFamily="34" charset="0"/>
+                <a:ea typeface="Calibri" pitchFamily="34" charset="-122"/>
+                <a:cs typeface="Calibri" pitchFamily="34" charset="-120"/>
+              </a:rPr>
+              <a:t> · le istruzioni vettoriali</a:t>
+            </a:r>
+            <a:endParaRPr lang="en-US" sz="1100" dirty="0"/>
+          </a:p>
+        </p:txBody>
+      </p:sp>
+      <p:sp>
+        <p:nvSpPr>
           <p:cNvPr id="25" name="Slide Number Placeholder 0"/>
           <p:cNvSpPr>
             <a:spLocks noGrp="1"/>
@@ -17897,6 +20460,133 @@
       </p:sp>
       <p:sp>
         <p:nvSpPr>
+          <p:cNvPr id="17" name="Shape 15"/>
+          <p:cNvSpPr/>
+          <p:nvPr/>
+        </p:nvSpPr>
+        <p:spPr>
+          <a:xfrm>
+            <a:off x="7723327" y="91440"/>
+            <a:ext cx="3919728" cy="274320"/>
+          </a:xfrm>
+          <a:prstGeom prst="rect">
+            <a:avLst/>
+          </a:prstGeom>
+          <a:solidFill>
+            <a:srgbClr val="E0F2FE"/>
+          </a:solidFill>
+          <a:ln w="12700">
+            <a:solidFill>
+              <a:srgbClr val="0369A1"/>
+            </a:solidFill>
+            <a:prstDash val="solid"/>
+          </a:ln>
+        </p:spPr>
+      </p:sp>
+      <p:sp>
+        <p:nvSpPr>
+          <p:cNvPr id="18" name="Shape 16"/>
+          <p:cNvSpPr/>
+          <p:nvPr/>
+        </p:nvSpPr>
+        <p:spPr>
+          <a:xfrm>
+            <a:off x="7723327" y="91440"/>
+            <a:ext cx="73152" cy="274320"/>
+          </a:xfrm>
+          <a:prstGeom prst="rect">
+            <a:avLst/>
+          </a:prstGeom>
+          <a:solidFill>
+            <a:srgbClr val="0369A1"/>
+          </a:solidFill>
+          <a:ln w="12700">
+            <a:solidFill>
+              <a:srgbClr val="0369A1"/>
+            </a:solidFill>
+            <a:prstDash val="solid"/>
+          </a:ln>
+        </p:spPr>
+      </p:sp>
+      <p:pic>
+        <p:nvPicPr>
+          <p:cNvPr id="19" name="Image 0" descr="preencoded.png">    </p:cNvPr>
+          <p:cNvPicPr>
+            <a:picLocks noChangeAspect="1"/>
+          </p:cNvPicPr>
+          <p:nvPr/>
+        </p:nvPicPr>
+        <p:blipFill>
+          <a:blip r:embed="rId1"/>
+          <a:stretch>
+            <a:fillRect/>
+          </a:stretch>
+        </p:blipFill>
+        <p:spPr>
+          <a:xfrm>
+            <a:off x="7851343" y="128016"/>
+            <a:ext cx="201168" cy="201168"/>
+          </a:xfrm>
+          <a:prstGeom prst="rect">
+            <a:avLst/>
+          </a:prstGeom>
+        </p:spPr>
+      </p:pic>
+      <p:sp>
+        <p:nvSpPr>
+          <p:cNvPr id="20" name="Text 17"/>
+          <p:cNvSpPr txBox="1"/>
+          <p:nvPr/>
+        </p:nvSpPr>
+        <p:spPr>
+          <a:xfrm>
+            <a:off x="8107375" y="91440"/>
+            <a:ext cx="3499104" cy="274320"/>
+          </a:xfrm>
+          <a:prstGeom prst="rect">
+            <a:avLst/>
+          </a:prstGeom>
+          <a:noFill/>
+          <a:ln/>
+        </p:spPr>
+        <p:txBody>
+          <a:bodyPr wrap="square" lIns="0" tIns="0" rIns="0" bIns="0" rtlCol="0" anchor="ctr"/>
+          <a:lstStyle/>
+          <a:p>
+            <a:pPr indent="0" marL="0">
+              <a:buNone/>
+            </a:pPr>
+            <a:r>
+              <a:rPr lang="en-US" sz="1100" b="1" dirty="0">
+                <a:solidFill>
+                  <a:srgbClr val="075985"/>
+                </a:solidFill>
+                <a:latin typeface="Calibri" pitchFamily="34" charset="0"/>
+                <a:ea typeface="Calibri" pitchFamily="34" charset="-122"/>
+                <a:cs typeface="Calibri" pitchFamily="34" charset="-120"/>
+              </a:rPr>
+              <a:t>DA COMPRENDERE OGGI</a:t>
+            </a:r>
+            <a:pPr indent="0" marL="0">
+              <a:buNone/>
+            </a:pPr>
+            <a:r>
+              <a:rPr lang="en-US" sz="1100" dirty="0">
+                <a:solidFill>
+                  <a:srgbClr val="075985"/>
+                </a:solidFill>
+                <a:latin typeface="Calibri" pitchFamily="34" charset="0"/>
+                <a:ea typeface="Calibri" pitchFamily="34" charset="-122"/>
+                <a:cs typeface="Calibri" pitchFamily="34" charset="-120"/>
+              </a:rPr>
+              <a:t> · acceleratori GPU e FPGA</a:t>
+            </a:r>
+            <a:endParaRPr lang="en-US" sz="1100" dirty="0"/>
+          </a:p>
+        </p:txBody>
+      </p:sp>
+      <p:sp>
+        <p:nvSpPr>
           <p:cNvPr id="25" name="Slide Number Placeholder 0"/>
           <p:cNvSpPr>
             <a:spLocks noGrp="1"/>
@@ -18685,6 +21375,133 @@
               <a:t>Sul kit questa regola costava tre istruzioni e tre cicli</a:t>
             </a:r>
             <a:endParaRPr lang="en-US" sz="1200" dirty="0"/>
+          </a:p>
+        </p:txBody>
+      </p:sp>
+      <p:sp>
+        <p:nvSpPr>
+          <p:cNvPr id="17" name="Shape 15"/>
+          <p:cNvSpPr/>
+          <p:nvPr/>
+        </p:nvSpPr>
+        <p:spPr>
+          <a:xfrm>
+            <a:off x="7723327" y="91440"/>
+            <a:ext cx="3919728" cy="274320"/>
+          </a:xfrm>
+          <a:prstGeom prst="rect">
+            <a:avLst/>
+          </a:prstGeom>
+          <a:solidFill>
+            <a:srgbClr val="E0F2FE"/>
+          </a:solidFill>
+          <a:ln w="12700">
+            <a:solidFill>
+              <a:srgbClr val="0369A1"/>
+            </a:solidFill>
+            <a:prstDash val="solid"/>
+          </a:ln>
+        </p:spPr>
+      </p:sp>
+      <p:sp>
+        <p:nvSpPr>
+          <p:cNvPr id="18" name="Shape 16"/>
+          <p:cNvSpPr/>
+          <p:nvPr/>
+        </p:nvSpPr>
+        <p:spPr>
+          <a:xfrm>
+            <a:off x="7723327" y="91440"/>
+            <a:ext cx="73152" cy="274320"/>
+          </a:xfrm>
+          <a:prstGeom prst="rect">
+            <a:avLst/>
+          </a:prstGeom>
+          <a:solidFill>
+            <a:srgbClr val="0369A1"/>
+          </a:solidFill>
+          <a:ln w="12700">
+            <a:solidFill>
+              <a:srgbClr val="0369A1"/>
+            </a:solidFill>
+            <a:prstDash val="solid"/>
+          </a:ln>
+        </p:spPr>
+      </p:sp>
+      <p:pic>
+        <p:nvPicPr>
+          <p:cNvPr id="19" name="Image 0" descr="preencoded.png">    </p:cNvPr>
+          <p:cNvPicPr>
+            <a:picLocks noChangeAspect="1"/>
+          </p:cNvPicPr>
+          <p:nvPr/>
+        </p:nvPicPr>
+        <p:blipFill>
+          <a:blip r:embed="rId1"/>
+          <a:stretch>
+            <a:fillRect/>
+          </a:stretch>
+        </p:blipFill>
+        <p:spPr>
+          <a:xfrm>
+            <a:off x="7851343" y="128016"/>
+            <a:ext cx="201168" cy="201168"/>
+          </a:xfrm>
+          <a:prstGeom prst="rect">
+            <a:avLst/>
+          </a:prstGeom>
+        </p:spPr>
+      </p:pic>
+      <p:sp>
+        <p:nvSpPr>
+          <p:cNvPr id="20" name="Text 17"/>
+          <p:cNvSpPr txBox="1"/>
+          <p:nvPr/>
+        </p:nvSpPr>
+        <p:spPr>
+          <a:xfrm>
+            <a:off x="8107375" y="91440"/>
+            <a:ext cx="3499104" cy="274320"/>
+          </a:xfrm>
+          <a:prstGeom prst="rect">
+            <a:avLst/>
+          </a:prstGeom>
+          <a:noFill/>
+          <a:ln/>
+        </p:spPr>
+        <p:txBody>
+          <a:bodyPr wrap="square" lIns="0" tIns="0" rIns="0" bIns="0" rtlCol="0" anchor="ctr"/>
+          <a:lstStyle/>
+          <a:p>
+            <a:pPr indent="0" marL="0">
+              <a:buNone/>
+            </a:pPr>
+            <a:r>
+              <a:rPr lang="en-US" sz="1100" b="1" dirty="0">
+                <a:solidFill>
+                  <a:srgbClr val="075985"/>
+                </a:solidFill>
+                <a:latin typeface="Calibri" pitchFamily="34" charset="0"/>
+                <a:ea typeface="Calibri" pitchFamily="34" charset="-122"/>
+                <a:cs typeface="Calibri" pitchFamily="34" charset="-120"/>
+              </a:rPr>
+              <a:t>DA COMPRENDERE OGGI</a:t>
+            </a:r>
+            <a:pPr indent="0" marL="0">
+              <a:buNone/>
+            </a:pPr>
+            <a:r>
+              <a:rPr lang="en-US" sz="1100" dirty="0">
+                <a:solidFill>
+                  <a:srgbClr val="075985"/>
+                </a:solidFill>
+                <a:latin typeface="Calibri" pitchFamily="34" charset="0"/>
+                <a:ea typeface="Calibri" pitchFamily="34" charset="-122"/>
+                <a:cs typeface="Calibri" pitchFamily="34" charset="-120"/>
+              </a:rPr>
+              <a:t> · acceleratori GPU e FPGA</a:t>
+            </a:r>
+            <a:endParaRPr lang="en-US" sz="1100" dirty="0"/>
           </a:p>
         </p:txBody>
       </p:sp>

--- a/it/slides/24-Architettura_dei_Calcolatori-Superscalari_HPC_GPU_FPGA-Codice.pptx
+++ b/it/slides/24-Architettura_dei_Calcolatori-Superscalari_HPC_GPU_FPGA-Codice.pptx
@@ -127,45 +127,45 @@
   <p:extLst>
     <p:ext uri="{521415D9-36F7-43E2-AB2F-B90AF26B5E84}">
       <p14:sectionLst xmlns:p14="http://schemas.microsoft.com/office/powerpoint/2010/main">
-        <p14:section name="Apertura" id="{f7cb39e0-30f1-80be-3a30-dbe37a948038}">
+        <p14:section name="Apertura" id="{12d815e6-a151-0f78-1911-d150dd414900}">
           <p14:sldIdLst>
             <p14:sldId id="256"/>
             <p14:sldId id="257"/>
           </p14:sldIdLst>
         </p14:section>
-        <p14:section name="Riscaldamento sulla macchina" id="{477132c6-6fc5-b731-0af6-c930645d7c1f}">
+        <p14:section name="Riscaldamento sulla macchina" id="{3bbf9657-4023-7f38-7444-e9f80607b07e}">
           <p14:sldIdLst>
             <p14:sldId id="258"/>
           </p14:sldIdLst>
         </p14:section>
-        <p14:section name="Processori superscalari" id="{0abe3a3b-87d7-161e-715d-ac0ae9d86ac1}">
+        <p14:section name="Processori superscalari" id="{2764e2b9-b894-ac58-1a80-48b9b52ff959}">
           <p14:sldIdLst>
             <p14:sldId id="259"/>
             <p14:sldId id="260"/>
           </p14:sldIdLst>
         </p14:section>
-        <p14:section name="Vettori: un'istruzione, molti dati" id="{95f0fe1c-8c50-f416-4ede-5f24c116159c}">
+        <p14:section name="Vettori: un'istruzione, molti dati" id="{bcab22c9-1757-2e38-9ee6-c14e4b8bda8a}">
           <p14:sldIdLst>
             <p14:sldId id="261"/>
             <p14:sldId id="262"/>
           </p14:sldIdLst>
         </p14:section>
-        <p14:section name="Acceleratori GPU" id="{f464e9d8-3a6c-6a71-afe8-bc4204501ff7}">
+        <p14:section name="Acceleratori GPU" id="{01460c91-c181-b566-4fc9-70e6245dff6c}">
           <p14:sldIdLst>
             <p14:sldId id="263"/>
           </p14:sldIdLst>
         </p14:section>
-        <p14:section name="Acceleratori FPGA" id="{231104ee-6e54-57cb-7692-6a6e3e397431}">
+        <p14:section name="Acceleratori FPGA" id="{dab23c3c-7116-eaf4-46cd-1a594f695da6}">
           <p14:sldIdLst>
             <p14:sldId id="264"/>
           </p14:sldIdLst>
         </p14:section>
-        <p14:section name="Ritorno alla macchina" id="{58b9e874-ef26-1560-85d3-3f5e4323b3f2}">
+        <p14:section name="Ritorno alla macchina" id="{43c9b649-60a5-169c-d76c-9c47e2bfc89d}">
           <p14:sldIdLst>
             <p14:sldId id="265"/>
           </p14:sldIdLst>
         </p14:section>
-        <p14:section name="Il programma completo" id="{80c8c245-f01c-e44a-915e-b29ed45b2daf}">
+        <p14:section name="Il programma completo" id="{da1f6c69-6a8f-991d-b889-f5388cdb8fe1}">
           <p14:sldIdLst>
             <p14:sldId id="266"/>
             <p14:sldId id="267"/>
@@ -173,7 +173,7 @@
             <p14:sldId id="269"/>
           </p14:sldIdLst>
         </p14:section>
-        <p14:section name="Eseguire e provare" id="{697fabd9-5e68-960d-7fad-6328a74692a9}">
+        <p14:section name="Eseguire e provare" id="{dbb3d072-8639-e761-5dce-81f068b099a0}">
           <p14:sldIdLst>
             <p14:sldId id="270"/>
             <p14:sldId id="271"/>
@@ -183,7 +183,7 @@
             <p14:sldId id="275"/>
           </p14:sldIdLst>
         </p14:section>
-        <p14:section name="Esercizi" id="{74171ac0-39f3-321a-fc59-4aec8f1789e0}">
+        <p14:section name="Esercizi" id="{a8cf4d4a-b2b0-8b3a-cd7a-5d8fef59eb9e}">
           <p14:sldIdLst>
             <p14:sldId id="276"/>
           </p14:sldIdLst>
